--- a/dashboard/public/downloads/dev-transformation-summary-high.pptx
+++ b/dashboard/public/downloads/dev-transformation-summary-high.pptx
@@ -924,7 +924,7 @@
             </a:avLst>
           </a:prstGeom>
           <a:solidFill>
-            <a:srgbClr val="EAF3FA"/>
+            <a:srgbClr val="EFF3F5"/>
           </a:solidFill>
           <a:ln/>
         </p:spPr>
@@ -938,7 +938,7 @@
             <a:r>
               <a:rPr lang="en-US" sz="1400" b="1" dirty="0">
                 <a:solidFill>
-                  <a:srgbClr val="0E6BA8"/>
+                  <a:srgbClr val="5A7184"/>
                 </a:solidFill>
                 <a:latin typeface="Malgun Gothic" pitchFamily="34" charset="0"/>
                 <a:ea typeface="Malgun Gothic" pitchFamily="34" charset="-122"/>
@@ -1098,7 +1098,7 @@
             </a:avLst>
           </a:prstGeom>
           <a:solidFill>
-            <a:srgbClr val="EAF3FA"/>
+            <a:srgbClr val="F5F7F8"/>
           </a:solidFill>
           <a:ln/>
         </p:spPr>
@@ -1118,7 +1118,7 @@
             <a:avLst/>
           </a:prstGeom>
           <a:solidFill>
-            <a:srgbClr val="0E6BA8"/>
+            <a:srgbClr val="17313B"/>
           </a:solidFill>
           <a:ln/>
         </p:spPr>
@@ -1171,7 +1171,7 @@
             <a:r>
               <a:rPr lang="en-US" sz="2100" b="1" dirty="0">
                 <a:solidFill>
-                  <a:srgbClr val="0E6BA8"/>
+                  <a:srgbClr val="17313B"/>
                 </a:solidFill>
                 <a:latin typeface="Malgun Gothic" pitchFamily="34" charset="0"/>
                 <a:ea typeface="Malgun Gothic" pitchFamily="34" charset="-122"/>
@@ -1200,7 +1200,7 @@
             </a:avLst>
           </a:prstGeom>
           <a:solidFill>
-            <a:srgbClr val="E6F4F4"/>
+            <a:srgbClr val="F5F7F8"/>
           </a:solidFill>
           <a:ln/>
         </p:spPr>
@@ -1220,7 +1220,7 @@
             <a:avLst/>
           </a:prstGeom>
           <a:solidFill>
-            <a:srgbClr val="028090"/>
+            <a:srgbClr val="17313B"/>
           </a:solidFill>
           <a:ln/>
         </p:spPr>
@@ -1273,7 +1273,7 @@
             <a:r>
               <a:rPr lang="en-US" sz="2100" b="1" dirty="0">
                 <a:solidFill>
-                  <a:srgbClr val="028090"/>
+                  <a:srgbClr val="17313B"/>
                 </a:solidFill>
                 <a:latin typeface="Malgun Gothic" pitchFamily="34" charset="0"/>
                 <a:ea typeface="Malgun Gothic" pitchFamily="34" charset="-122"/>
@@ -1302,7 +1302,7 @@
             </a:avLst>
           </a:prstGeom>
           <a:solidFill>
-            <a:srgbClr val="E8F6F0"/>
+            <a:srgbClr val="F5F7F8"/>
           </a:solidFill>
           <a:ln/>
         </p:spPr>
@@ -1322,7 +1322,7 @@
             <a:avLst/>
           </a:prstGeom>
           <a:solidFill>
-            <a:srgbClr val="02A878"/>
+            <a:srgbClr val="17313B"/>
           </a:solidFill>
           <a:ln/>
         </p:spPr>
@@ -1375,7 +1375,7 @@
             <a:r>
               <a:rPr lang="en-US" sz="2100" b="1" dirty="0">
                 <a:solidFill>
-                  <a:srgbClr val="02A878"/>
+                  <a:srgbClr val="17313B"/>
                 </a:solidFill>
                 <a:latin typeface="Malgun Gothic" pitchFamily="34" charset="0"/>
                 <a:ea typeface="Malgun Gothic" pitchFamily="34" charset="-122"/>
@@ -1404,7 +1404,7 @@
           <a:noFill/>
           <a:ln w="19050">
             <a:solidFill>
-              <a:srgbClr val="0E6BA8"/>
+              <a:srgbClr val="C4CFD6"/>
             </a:solidFill>
             <a:prstDash val="solid"/>
           </a:ln>
@@ -1425,7 +1425,7 @@
             <a:avLst/>
           </a:prstGeom>
           <a:solidFill>
-            <a:srgbClr val="0E6BA8"/>
+            <a:srgbClr val="17313B"/>
           </a:solidFill>
           <a:ln/>
         </p:spPr>
@@ -1457,7 +1457,7 @@
             <a:r>
               <a:rPr lang="en-US" sz="1400" b="1" dirty="0">
                 <a:solidFill>
-                  <a:srgbClr val="0E6BA8"/>
+                  <a:srgbClr val="17313B"/>
                 </a:solidFill>
                 <a:latin typeface="Malgun Gothic" pitchFamily="34" charset="0"/>
                 <a:ea typeface="Malgun Gothic" pitchFamily="34" charset="-122"/>
@@ -1546,7 +1546,7 @@
             <a:avLst/>
           </a:prstGeom>
           <a:solidFill>
-            <a:srgbClr val="0E6BA8"/>
+            <a:srgbClr val="17313B"/>
           </a:solidFill>
           <a:ln/>
         </p:spPr>
@@ -1578,7 +1578,7 @@
             <a:r>
               <a:rPr lang="en-US" sz="1400" b="1" dirty="0">
                 <a:solidFill>
-                  <a:srgbClr val="0E6BA8"/>
+                  <a:srgbClr val="17313B"/>
                 </a:solidFill>
                 <a:latin typeface="Malgun Gothic" pitchFamily="34" charset="0"/>
                 <a:ea typeface="Malgun Gothic" pitchFamily="34" charset="-122"/>
@@ -1667,7 +1667,7 @@
             <a:avLst/>
           </a:prstGeom>
           <a:solidFill>
-            <a:srgbClr val="0E6BA8"/>
+            <a:srgbClr val="17313B"/>
           </a:solidFill>
           <a:ln/>
         </p:spPr>
@@ -1699,7 +1699,7 @@
             <a:r>
               <a:rPr lang="en-US" sz="1400" b="1" dirty="0">
                 <a:solidFill>
-                  <a:srgbClr val="0E6BA8"/>
+                  <a:srgbClr val="17313B"/>
                 </a:solidFill>
                 <a:latin typeface="Malgun Gothic" pitchFamily="34" charset="0"/>
                 <a:ea typeface="Malgun Gothic" pitchFamily="34" charset="-122"/>
@@ -1794,7 +1794,7 @@
           </a:solidFill>
           <a:ln w="12700">
             <a:solidFill>
-              <a:srgbClr val="0E6BA8"/>
+              <a:srgbClr val="DCE4E9"/>
             </a:solidFill>
             <a:prstDash val="solid"/>
           </a:ln>
@@ -1985,7 +1985,7 @@
           </a:solidFill>
           <a:ln w="12700">
             <a:solidFill>
-              <a:srgbClr val="D9E6EC"/>
+              <a:srgbClr val="DCE4E9"/>
             </a:solidFill>
           </a:ln>
         </p:spPr>
@@ -2118,7 +2118,7 @@
           </a:solidFill>
           <a:ln w="12700">
             <a:solidFill>
-              <a:srgbClr val="D9E6EC"/>
+              <a:srgbClr val="DCE4E9"/>
             </a:solidFill>
           </a:ln>
         </p:spPr>
@@ -2251,7 +2251,7 @@
           </a:solidFill>
           <a:ln w="12700">
             <a:solidFill>
-              <a:srgbClr val="D9E6EC"/>
+              <a:srgbClr val="DCE4E9"/>
             </a:solidFill>
           </a:ln>
         </p:spPr>
@@ -2384,7 +2384,7 @@
           </a:solidFill>
           <a:ln w="12700">
             <a:solidFill>
-              <a:srgbClr val="D9E6EC"/>
+              <a:srgbClr val="DCE4E9"/>
             </a:solidFill>
           </a:ln>
         </p:spPr>
@@ -2517,7 +2517,7 @@
           </a:solidFill>
           <a:ln w="12700">
             <a:solidFill>
-              <a:srgbClr val="028090"/>
+              <a:srgbClr val="DCE4E9"/>
             </a:solidFill>
             <a:prstDash val="solid"/>
           </a:ln>
@@ -2594,14 +2594,14 @@
         </p:nvSpPr>
         <p:spPr>
           <a:xfrm>
-            <a:off x="8842248" y="1956816"/>
-            <a:ext cx="475488" cy="475488"/>
+            <a:off x="8897112" y="1847088"/>
+            <a:ext cx="402336" cy="402336"/>
           </a:xfrm>
           <a:prstGeom prst="ellipse">
             <a:avLst/>
           </a:prstGeom>
           <a:solidFill>
-            <a:srgbClr val="0E6BA8"/>
+            <a:srgbClr val="5A7184"/>
           </a:solidFill>
           <a:ln/>
         </p:spPr>
@@ -2622,8 +2622,8 @@
         </p:blipFill>
         <p:spPr>
           <a:xfrm>
-            <a:off x="8956365" y="2070933"/>
-            <a:ext cx="247254" cy="247254"/>
+            <a:off x="8993673" y="1943649"/>
+            <a:ext cx="209215" cy="209215"/>
           </a:xfrm>
           <a:prstGeom prst="rect">
             <a:avLst/>
@@ -2638,8 +2638,8 @@
         </p:nvSpPr>
         <p:spPr>
           <a:xfrm>
-            <a:off x="8330184" y="2468880"/>
-            <a:ext cx="1499616" cy="292608"/>
+            <a:off x="8330184" y="2267712"/>
+            <a:ext cx="1536192" cy="274320"/>
           </a:xfrm>
           <a:prstGeom prst="rect">
             <a:avLst/>
@@ -2655,7 +2655,7 @@
               <a:buNone/>
             </a:pPr>
             <a:r>
-              <a:rPr lang="en-US" sz="1600" b="1" dirty="0">
+              <a:rPr lang="en-US" sz="1500" b="1" dirty="0">
                 <a:solidFill>
                   <a:srgbClr val="17313B"/>
                 </a:solidFill>
@@ -2665,7 +2665,7 @@
               </a:rPr>
               <a:t>기술</a:t>
             </a:r>
-            <a:endParaRPr lang="en-US" sz="1600" dirty="0"/>
+            <a:endParaRPr lang="en-US" sz="1500" dirty="0"/>
           </a:p>
         </p:txBody>
       </p:sp>
@@ -2677,8 +2677,8 @@
         </p:nvSpPr>
         <p:spPr>
           <a:xfrm>
-            <a:off x="8275320" y="2761488"/>
-            <a:ext cx="1609344" cy="237744"/>
+            <a:off x="8275320" y="2542032"/>
+            <a:ext cx="1645920" cy="219456"/>
           </a:xfrm>
           <a:prstGeom prst="rect">
             <a:avLst/>
@@ -2694,7 +2694,7 @@
               <a:buNone/>
             </a:pPr>
             <a:r>
-              <a:rPr lang="en-US" sz="1100" dirty="0">
+              <a:rPr lang="en-US" sz="1050" dirty="0">
                 <a:solidFill>
                   <a:srgbClr val="5A7184"/>
                 </a:solidFill>
@@ -2704,7 +2704,7 @@
               </a:rPr>
               <a:t>워크로드 랩·모델</a:t>
             </a:r>
-            <a:endParaRPr lang="en-US" sz="1100" dirty="0"/>
+            <a:endParaRPr lang="en-US" sz="1050" dirty="0"/>
           </a:p>
         </p:txBody>
       </p:sp>
@@ -2716,14 +2716,14 @@
         </p:nvSpPr>
         <p:spPr>
           <a:xfrm>
-            <a:off x="10506456" y="1956816"/>
-            <a:ext cx="475488" cy="475488"/>
+            <a:off x="10561320" y="1847088"/>
+            <a:ext cx="402336" cy="402336"/>
           </a:xfrm>
           <a:prstGeom prst="ellipse">
             <a:avLst/>
           </a:prstGeom>
           <a:solidFill>
-            <a:srgbClr val="028090"/>
+            <a:srgbClr val="5A7184"/>
           </a:solidFill>
           <a:ln/>
         </p:spPr>
@@ -2744,8 +2744,8 @@
         </p:blipFill>
         <p:spPr>
           <a:xfrm>
-            <a:off x="10620573" y="2070933"/>
-            <a:ext cx="247254" cy="247254"/>
+            <a:off x="10657881" y="1943649"/>
+            <a:ext cx="209215" cy="209215"/>
           </a:xfrm>
           <a:prstGeom prst="rect">
             <a:avLst/>
@@ -2760,8 +2760,8 @@
         </p:nvSpPr>
         <p:spPr>
           <a:xfrm>
-            <a:off x="9994392" y="2468880"/>
-            <a:ext cx="1499616" cy="292608"/>
+            <a:off x="9994392" y="2267712"/>
+            <a:ext cx="1536192" cy="274320"/>
           </a:xfrm>
           <a:prstGeom prst="rect">
             <a:avLst/>
@@ -2777,7 +2777,7 @@
               <a:buNone/>
             </a:pPr>
             <a:r>
-              <a:rPr lang="en-US" sz="1600" b="1" dirty="0">
+              <a:rPr lang="en-US" sz="1500" b="1" dirty="0">
                 <a:solidFill>
                   <a:srgbClr val="17313B"/>
                 </a:solidFill>
@@ -2787,7 +2787,7 @@
               </a:rPr>
               <a:t>문화</a:t>
             </a:r>
-            <a:endParaRPr lang="en-US" sz="1600" dirty="0"/>
+            <a:endParaRPr lang="en-US" sz="1500" dirty="0"/>
           </a:p>
         </p:txBody>
       </p:sp>
@@ -2799,8 +2799,8 @@
         </p:nvSpPr>
         <p:spPr>
           <a:xfrm>
-            <a:off x="9939528" y="2761488"/>
-            <a:ext cx="1609344" cy="237744"/>
+            <a:off x="9939528" y="2542032"/>
+            <a:ext cx="1645920" cy="219456"/>
           </a:xfrm>
           <a:prstGeom prst="rect">
             <a:avLst/>
@@ -2816,7 +2816,7 @@
               <a:buNone/>
             </a:pPr>
             <a:r>
-              <a:rPr lang="en-US" sz="1100" dirty="0">
+              <a:rPr lang="en-US" sz="1050" dirty="0">
                 <a:solidFill>
                   <a:srgbClr val="5A7184"/>
                 </a:solidFill>
@@ -2824,9 +2824,9 @@
                 <a:ea typeface="Malgun Gothic" pitchFamily="34" charset="-122"/>
                 <a:cs typeface="Malgun Gothic" pitchFamily="34" charset="-120"/>
               </a:rPr>
-              <a:t>가설 제안·호명</a:t>
-            </a:r>
-            <a:endParaRPr lang="en-US" sz="1100" dirty="0"/>
+              <a:t>모난 놈 → 호명</a:t>
+            </a:r>
+            <a:endParaRPr lang="en-US" sz="1050" dirty="0"/>
           </a:p>
         </p:txBody>
       </p:sp>
@@ -2838,14 +2838,14 @@
         </p:nvSpPr>
         <p:spPr>
           <a:xfrm>
-            <a:off x="8842248" y="3200400"/>
-            <a:ext cx="475488" cy="475488"/>
+            <a:off x="8897112" y="2907792"/>
+            <a:ext cx="402336" cy="402336"/>
           </a:xfrm>
           <a:prstGeom prst="ellipse">
             <a:avLst/>
           </a:prstGeom>
           <a:solidFill>
-            <a:srgbClr val="02A878"/>
+            <a:srgbClr val="5A7184"/>
           </a:solidFill>
           <a:ln/>
         </p:spPr>
@@ -2866,8 +2866,8 @@
         </p:blipFill>
         <p:spPr>
           <a:xfrm>
-            <a:off x="8956365" y="3314517"/>
-            <a:ext cx="247254" cy="247254"/>
+            <a:off x="8993673" y="3004353"/>
+            <a:ext cx="209215" cy="209215"/>
           </a:xfrm>
           <a:prstGeom prst="rect">
             <a:avLst/>
@@ -2882,8 +2882,8 @@
         </p:nvSpPr>
         <p:spPr>
           <a:xfrm>
-            <a:off x="8330184" y="3712464"/>
-            <a:ext cx="1499616" cy="292608"/>
+            <a:off x="8330184" y="3328416"/>
+            <a:ext cx="1536192" cy="274320"/>
           </a:xfrm>
           <a:prstGeom prst="rect">
             <a:avLst/>
@@ -2899,7 +2899,7 @@
               <a:buNone/>
             </a:pPr>
             <a:r>
-              <a:rPr lang="en-US" sz="1600" b="1" dirty="0">
+              <a:rPr lang="en-US" sz="1500" b="1" dirty="0">
                 <a:solidFill>
                   <a:srgbClr val="17313B"/>
                 </a:solidFill>
@@ -2909,7 +2909,7 @@
               </a:rPr>
               <a:t>조직</a:t>
             </a:r>
-            <a:endParaRPr lang="en-US" sz="1600" dirty="0"/>
+            <a:endParaRPr lang="en-US" sz="1500" dirty="0"/>
           </a:p>
         </p:txBody>
       </p:sp>
@@ -2921,8 +2921,8 @@
         </p:nvSpPr>
         <p:spPr>
           <a:xfrm>
-            <a:off x="8275320" y="4005072"/>
-            <a:ext cx="1609344" cy="237744"/>
+            <a:off x="8275320" y="3602736"/>
+            <a:ext cx="1645920" cy="219456"/>
           </a:xfrm>
           <a:prstGeom prst="rect">
             <a:avLst/>
@@ -2938,7 +2938,7 @@
               <a:buNone/>
             </a:pPr>
             <a:r>
-              <a:rPr lang="en-US" sz="1100" dirty="0">
+              <a:rPr lang="en-US" sz="1050" dirty="0">
                 <a:solidFill>
                   <a:srgbClr val="5A7184"/>
                 </a:solidFill>
@@ -2946,9 +2946,9 @@
                 <a:ea typeface="Malgun Gothic" pitchFamily="34" charset="-122"/>
                 <a:cs typeface="Malgun Gothic" pitchFamily="34" charset="-120"/>
               </a:rPr>
-              <a:t>Pod·DE 트랙</a:t>
-            </a:r>
-            <a:endParaRPr lang="en-US" sz="1100" dirty="0"/>
+              <a:t>DE 스타·Pod 상주</a:t>
+            </a:r>
+            <a:endParaRPr lang="en-US" sz="1050" dirty="0"/>
           </a:p>
         </p:txBody>
       </p:sp>
@@ -2960,14 +2960,14 @@
         </p:nvSpPr>
         <p:spPr>
           <a:xfrm>
-            <a:off x="10506456" y="3200400"/>
-            <a:ext cx="475488" cy="475488"/>
+            <a:off x="10561320" y="2907792"/>
+            <a:ext cx="402336" cy="402336"/>
           </a:xfrm>
           <a:prstGeom prst="ellipse">
             <a:avLst/>
           </a:prstGeom>
           <a:solidFill>
-            <a:srgbClr val="4C7C94"/>
+            <a:srgbClr val="5A7184"/>
           </a:solidFill>
           <a:ln/>
         </p:spPr>
@@ -2988,8 +2988,8 @@
         </p:blipFill>
         <p:spPr>
           <a:xfrm>
-            <a:off x="10620573" y="3314517"/>
-            <a:ext cx="247254" cy="247254"/>
+            <a:off x="10657881" y="3004353"/>
+            <a:ext cx="209215" cy="209215"/>
           </a:xfrm>
           <a:prstGeom prst="rect">
             <a:avLst/>
@@ -3004,8 +3004,8 @@
         </p:nvSpPr>
         <p:spPr>
           <a:xfrm>
-            <a:off x="9994392" y="3712464"/>
-            <a:ext cx="1499616" cy="292608"/>
+            <a:off x="9994392" y="3328416"/>
+            <a:ext cx="1536192" cy="274320"/>
           </a:xfrm>
           <a:prstGeom prst="rect">
             <a:avLst/>
@@ -3021,7 +3021,7 @@
               <a:buNone/>
             </a:pPr>
             <a:r>
-              <a:rPr lang="en-US" sz="1600" b="1" dirty="0">
+              <a:rPr lang="en-US" sz="1500" b="1" dirty="0">
                 <a:solidFill>
                   <a:srgbClr val="17313B"/>
                 </a:solidFill>
@@ -3031,7 +3031,7 @@
               </a:rPr>
               <a:t>방식</a:t>
             </a:r>
-            <a:endParaRPr lang="en-US" sz="1600" dirty="0"/>
+            <a:endParaRPr lang="en-US" sz="1500" dirty="0"/>
           </a:p>
         </p:txBody>
       </p:sp>
@@ -3043,8 +3043,8 @@
         </p:nvSpPr>
         <p:spPr>
           <a:xfrm>
-            <a:off x="9939528" y="4005072"/>
-            <a:ext cx="1609344" cy="237744"/>
+            <a:off x="9939528" y="3602736"/>
+            <a:ext cx="1645920" cy="219456"/>
           </a:xfrm>
           <a:prstGeom prst="rect">
             <a:avLst/>
@@ -3060,7 +3060,7 @@
               <a:buNone/>
             </a:pPr>
             <a:r>
-              <a:rPr lang="en-US" sz="1100" dirty="0">
+              <a:rPr lang="en-US" sz="1050" dirty="0">
                 <a:solidFill>
                   <a:srgbClr val="5A7184"/>
                 </a:solidFill>
@@ -3070,7 +3070,7 @@
               </a:rPr>
               <a:t>교차 리뷰·PoA</a:t>
             </a:r>
-            <a:endParaRPr lang="en-US" sz="1100" dirty="0"/>
+            <a:endParaRPr lang="en-US" sz="1050" dirty="0"/>
           </a:p>
         </p:txBody>
       </p:sp>
@@ -3082,7 +3082,7 @@
         </p:nvSpPr>
         <p:spPr>
           <a:xfrm>
-            <a:off x="8695944" y="4828032"/>
+            <a:off x="8695944" y="4206240"/>
             <a:ext cx="2468880" cy="0"/>
           </a:xfrm>
           <a:prstGeom prst="line">
@@ -3090,6 +3090,279 @@
           </a:prstGeom>
           <a:noFill/>
           <a:ln w="19050">
+            <a:solidFill>
+              <a:srgbClr val="C4CFD6"/>
+            </a:solidFill>
+            <a:prstDash val="solid"/>
+          </a:ln>
+        </p:spPr>
+      </p:sp>
+      <p:sp>
+        <p:nvSpPr>
+          <p:cNvPr id="63" name="Shape 55"/>
+          <p:cNvSpPr/>
+          <p:nvPr/>
+        </p:nvSpPr>
+        <p:spPr>
+          <a:xfrm>
+            <a:off x="8631936" y="4142232"/>
+            <a:ext cx="128016" cy="128016"/>
+          </a:xfrm>
+          <a:prstGeom prst="ellipse">
+            <a:avLst/>
+          </a:prstGeom>
+          <a:solidFill>
+            <a:srgbClr val="17313B"/>
+          </a:solidFill>
+          <a:ln/>
+        </p:spPr>
+      </p:sp>
+      <p:sp>
+        <p:nvSpPr>
+          <p:cNvPr id="64" name="Text 56"/>
+          <p:cNvSpPr/>
+          <p:nvPr/>
+        </p:nvSpPr>
+        <p:spPr>
+          <a:xfrm>
+            <a:off x="8147304" y="4334256"/>
+            <a:ext cx="1097280" cy="457200"/>
+          </a:xfrm>
+          <a:prstGeom prst="rect">
+            <a:avLst/>
+          </a:prstGeom>
+          <a:noFill/>
+          <a:ln/>
+        </p:spPr>
+        <p:txBody>
+          <a:bodyPr wrap="square" lIns="0" tIns="0" rIns="0" bIns="0" rtlCol="0" anchor="ctr"/>
+          <a:lstStyle/>
+          <a:p>
+            <a:pPr algn="ctr" indent="0" marL="0">
+              <a:lnSpc>
+                <a:spcPct val="100000"/>
+              </a:lnSpc>
+              <a:buNone/>
+            </a:pPr>
+            <a:r>
+              <a:rPr lang="en-US" sz="1150" b="1" dirty="0">
+                <a:solidFill>
+                  <a:srgbClr val="17313B"/>
+                </a:solidFill>
+                <a:latin typeface="Malgun Gothic" pitchFamily="34" charset="0"/>
+                <a:ea typeface="Malgun Gothic" pitchFamily="34" charset="-122"/>
+                <a:cs typeface="Malgun Gothic" pitchFamily="34" charset="-120"/>
+              </a:rPr>
+              <a:t>90일</a:t>
+            </a:r>
+            <a:endParaRPr lang="en-US" sz="1150" dirty="0"/>
+          </a:p>
+          <a:p>
+            <a:pPr algn="ctr" indent="0" marL="0">
+              <a:lnSpc>
+                <a:spcPct val="100000"/>
+              </a:lnSpc>
+              <a:buNone/>
+            </a:pPr>
+            <a:r>
+              <a:rPr lang="en-US" sz="1150" b="1" dirty="0">
+                <a:solidFill>
+                  <a:srgbClr val="17313B"/>
+                </a:solidFill>
+                <a:latin typeface="Malgun Gothic" pitchFamily="34" charset="0"/>
+                <a:ea typeface="Malgun Gothic" pitchFamily="34" charset="-122"/>
+                <a:cs typeface="Malgun Gothic" pitchFamily="34" charset="-120"/>
+              </a:rPr>
+              <a:t>증명</a:t>
+            </a:r>
+            <a:endParaRPr lang="en-US" sz="1150" dirty="0"/>
+          </a:p>
+        </p:txBody>
+      </p:sp>
+      <p:sp>
+        <p:nvSpPr>
+          <p:cNvPr id="65" name="Shape 57"/>
+          <p:cNvSpPr/>
+          <p:nvPr/>
+        </p:nvSpPr>
+        <p:spPr>
+          <a:xfrm>
+            <a:off x="9866376" y="4142232"/>
+            <a:ext cx="128016" cy="128016"/>
+          </a:xfrm>
+          <a:prstGeom prst="ellipse">
+            <a:avLst/>
+          </a:prstGeom>
+          <a:solidFill>
+            <a:srgbClr val="17313B"/>
+          </a:solidFill>
+          <a:ln/>
+        </p:spPr>
+      </p:sp>
+      <p:sp>
+        <p:nvSpPr>
+          <p:cNvPr id="66" name="Text 58"/>
+          <p:cNvSpPr/>
+          <p:nvPr/>
+        </p:nvSpPr>
+        <p:spPr>
+          <a:xfrm>
+            <a:off x="9381744" y="4334256"/>
+            <a:ext cx="1097280" cy="457200"/>
+          </a:xfrm>
+          <a:prstGeom prst="rect">
+            <a:avLst/>
+          </a:prstGeom>
+          <a:noFill/>
+          <a:ln/>
+        </p:spPr>
+        <p:txBody>
+          <a:bodyPr wrap="square" lIns="0" tIns="0" rIns="0" bIns="0" rtlCol="0" anchor="ctr"/>
+          <a:lstStyle/>
+          <a:p>
+            <a:pPr algn="ctr" indent="0" marL="0">
+              <a:lnSpc>
+                <a:spcPct val="100000"/>
+              </a:lnSpc>
+              <a:buNone/>
+            </a:pPr>
+            <a:r>
+              <a:rPr lang="en-US" sz="1150" b="1" dirty="0">
+                <a:solidFill>
+                  <a:srgbClr val="17313B"/>
+                </a:solidFill>
+                <a:latin typeface="Malgun Gothic" pitchFamily="34" charset="0"/>
+                <a:ea typeface="Malgun Gothic" pitchFamily="34" charset="-122"/>
+                <a:cs typeface="Malgun Gothic" pitchFamily="34" charset="-120"/>
+              </a:rPr>
+              <a:t>1년</a:t>
+            </a:r>
+            <a:endParaRPr lang="en-US" sz="1150" dirty="0"/>
+          </a:p>
+          <a:p>
+            <a:pPr algn="ctr" indent="0" marL="0">
+              <a:lnSpc>
+                <a:spcPct val="100000"/>
+              </a:lnSpc>
+              <a:buNone/>
+            </a:pPr>
+            <a:r>
+              <a:rPr lang="en-US" sz="1150" b="1" dirty="0">
+                <a:solidFill>
+                  <a:srgbClr val="17313B"/>
+                </a:solidFill>
+                <a:latin typeface="Malgun Gothic" pitchFamily="34" charset="0"/>
+                <a:ea typeface="Malgun Gothic" pitchFamily="34" charset="-122"/>
+                <a:cs typeface="Malgun Gothic" pitchFamily="34" charset="-120"/>
+              </a:rPr>
+              <a:t>제도화</a:t>
+            </a:r>
+            <a:endParaRPr lang="en-US" sz="1150" dirty="0"/>
+          </a:p>
+        </p:txBody>
+      </p:sp>
+      <p:sp>
+        <p:nvSpPr>
+          <p:cNvPr id="67" name="Shape 59"/>
+          <p:cNvSpPr/>
+          <p:nvPr/>
+        </p:nvSpPr>
+        <p:spPr>
+          <a:xfrm>
+            <a:off x="11100816" y="4142232"/>
+            <a:ext cx="128016" cy="128016"/>
+          </a:xfrm>
+          <a:prstGeom prst="ellipse">
+            <a:avLst/>
+          </a:prstGeom>
+          <a:solidFill>
+            <a:srgbClr val="17313B"/>
+          </a:solidFill>
+          <a:ln/>
+        </p:spPr>
+      </p:sp>
+      <p:sp>
+        <p:nvSpPr>
+          <p:cNvPr id="68" name="Text 60"/>
+          <p:cNvSpPr/>
+          <p:nvPr/>
+        </p:nvSpPr>
+        <p:spPr>
+          <a:xfrm>
+            <a:off x="10616184" y="4334256"/>
+            <a:ext cx="1097280" cy="457200"/>
+          </a:xfrm>
+          <a:prstGeom prst="rect">
+            <a:avLst/>
+          </a:prstGeom>
+          <a:noFill/>
+          <a:ln/>
+        </p:spPr>
+        <p:txBody>
+          <a:bodyPr wrap="square" lIns="0" tIns="0" rIns="0" bIns="0" rtlCol="0" anchor="ctr"/>
+          <a:lstStyle/>
+          <a:p>
+            <a:pPr algn="ctr" indent="0" marL="0">
+              <a:lnSpc>
+                <a:spcPct val="100000"/>
+              </a:lnSpc>
+              <a:buNone/>
+            </a:pPr>
+            <a:r>
+              <a:rPr lang="en-US" sz="1150" b="1" dirty="0">
+                <a:solidFill>
+                  <a:srgbClr val="17313B"/>
+                </a:solidFill>
+                <a:latin typeface="Malgun Gothic" pitchFamily="34" charset="0"/>
+                <a:ea typeface="Malgun Gothic" pitchFamily="34" charset="-122"/>
+                <a:cs typeface="Malgun Gothic" pitchFamily="34" charset="-120"/>
+              </a:rPr>
+              <a:t>3년</a:t>
+            </a:r>
+            <a:endParaRPr lang="en-US" sz="1150" dirty="0"/>
+          </a:p>
+          <a:p>
+            <a:pPr algn="ctr" indent="0" marL="0">
+              <a:lnSpc>
+                <a:spcPct val="100000"/>
+              </a:lnSpc>
+              <a:buNone/>
+            </a:pPr>
+            <a:r>
+              <a:rPr lang="en-US" sz="1150" b="1" dirty="0">
+                <a:solidFill>
+                  <a:srgbClr val="17313B"/>
+                </a:solidFill>
+                <a:latin typeface="Malgun Gothic" pitchFamily="34" charset="0"/>
+                <a:ea typeface="Malgun Gothic" pitchFamily="34" charset="-122"/>
+                <a:cs typeface="Malgun Gothic" pitchFamily="34" charset="-120"/>
+              </a:rPr>
+              <a:t>표준화</a:t>
+            </a:r>
+            <a:endParaRPr lang="en-US" sz="1150" dirty="0"/>
+          </a:p>
+        </p:txBody>
+      </p:sp>
+      <p:sp>
+        <p:nvSpPr>
+          <p:cNvPr id="69" name="Shape 61"/>
+          <p:cNvSpPr/>
+          <p:nvPr/>
+        </p:nvSpPr>
+        <p:spPr>
+          <a:xfrm>
+            <a:off x="8311896" y="4864608"/>
+            <a:ext cx="3236976" cy="512064"/>
+          </a:xfrm>
+          <a:prstGeom prst="roundRect">
+            <a:avLst>
+              <a:gd name="adj" fmla="val 14286"/>
+            </a:avLst>
+          </a:prstGeom>
+          <a:solidFill>
+            <a:srgbClr val="E8F6F0"/>
+          </a:solidFill>
+          <a:ln w="15875">
             <a:solidFill>
               <a:srgbClr val="02A878"/>
             </a:solidFill>
@@ -3097,55 +3370,59 @@
           </a:ln>
         </p:spPr>
       </p:sp>
-      <p:sp>
-        <p:nvSpPr>
-          <p:cNvPr id="63" name="Shape 55"/>
-          <p:cNvSpPr/>
-          <p:nvPr/>
-        </p:nvSpPr>
-        <p:spPr>
-          <a:xfrm>
-            <a:off x="8631936" y="4764024"/>
-            <a:ext cx="128016" cy="128016"/>
-          </a:xfrm>
-          <a:prstGeom prst="ellipse">
-            <a:avLst/>
-          </a:prstGeom>
-          <a:solidFill>
-            <a:srgbClr val="02A878"/>
-          </a:solidFill>
-          <a:ln/>
-        </p:spPr>
-      </p:sp>
-      <p:sp>
-        <p:nvSpPr>
-          <p:cNvPr id="64" name="Text 56"/>
-          <p:cNvSpPr/>
-          <p:nvPr/>
-        </p:nvSpPr>
-        <p:spPr>
-          <a:xfrm>
-            <a:off x="8147304" y="4956048"/>
-            <a:ext cx="1097280" cy="475488"/>
-          </a:xfrm>
-          <a:prstGeom prst="rect">
-            <a:avLst/>
-          </a:prstGeom>
-          <a:noFill/>
-          <a:ln/>
-        </p:spPr>
-        <p:txBody>
-          <a:bodyPr wrap="square" lIns="0" tIns="0" rIns="0" bIns="0" rtlCol="0" anchor="ctr"/>
-          <a:lstStyle/>
-          <a:p>
-            <a:pPr algn="ctr" indent="0" marL="0">
+      <p:pic>
+        <p:nvPicPr>
+          <p:cNvPr id="70" name="Image 6" descr="preencoded.png">    </p:cNvPr>
+          <p:cNvPicPr>
+            <a:picLocks noChangeAspect="1"/>
+          </p:cNvPicPr>
+          <p:nvPr/>
+        </p:nvPicPr>
+        <p:blipFill>
+          <a:blip r:embed="rId7"/>
+          <a:stretch>
+            <a:fillRect/>
+          </a:stretch>
+        </p:blipFill>
+        <p:spPr>
+          <a:xfrm>
+            <a:off x="8494776" y="4937760"/>
+            <a:ext cx="365760" cy="365760"/>
+          </a:xfrm>
+          <a:prstGeom prst="rect">
+            <a:avLst/>
+          </a:prstGeom>
+        </p:spPr>
+      </p:pic>
+      <p:sp>
+        <p:nvSpPr>
+          <p:cNvPr id="71" name="Text 62"/>
+          <p:cNvSpPr/>
+          <p:nvPr/>
+        </p:nvSpPr>
+        <p:spPr>
+          <a:xfrm>
+            <a:off x="8988552" y="4864608"/>
+            <a:ext cx="2377440" cy="512064"/>
+          </a:xfrm>
+          <a:prstGeom prst="rect">
+            <a:avLst/>
+          </a:prstGeom>
+          <a:noFill/>
+          <a:ln/>
+        </p:spPr>
+        <p:txBody>
+          <a:bodyPr wrap="square" lIns="0" tIns="0" rIns="0" bIns="0" rtlCol="0" anchor="ctr"/>
+          <a:lstStyle/>
+          <a:p>
+            <a:pPr indent="0" marL="0">
               <a:lnSpc>
-                <a:spcPct val="100000"/>
+                <a:spcPct val="112000"/>
               </a:lnSpc>
               <a:buNone/>
             </a:pPr>
             <a:r>
-              <a:rPr lang="en-US" sz="1200" b="1" dirty="0">
+              <a:rPr lang="en-US" sz="1300" b="1" dirty="0">
                 <a:solidFill>
                   <a:srgbClr val="17313B"/>
                 </a:solidFill>
@@ -3153,199 +3430,35 @@
                 <a:ea typeface="Malgun Gothic" pitchFamily="34" charset="-122"/>
                 <a:cs typeface="Malgun Gothic" pitchFamily="34" charset="-120"/>
               </a:rPr>
-              <a:t>90일</a:t>
-            </a:r>
-            <a:endParaRPr lang="en-US" sz="1200" dirty="0"/>
-          </a:p>
-          <a:p>
-            <a:pPr algn="ctr" indent="0" marL="0">
+              <a:t>DE를 스타 플레이어로</a:t>
+            </a:r>
+            <a:endParaRPr lang="en-US" sz="1300" dirty="0"/>
+          </a:p>
+          <a:p>
+            <a:pPr indent="0" marL="0">
               <a:lnSpc>
-                <a:spcPct val="100000"/>
+                <a:spcPct val="112000"/>
               </a:lnSpc>
               <a:buNone/>
             </a:pPr>
             <a:r>
-              <a:rPr lang="en-US" sz="1200" b="1" dirty="0">
-                <a:solidFill>
-                  <a:srgbClr val="17313B"/>
-                </a:solidFill>
-                <a:latin typeface="Malgun Gothic" pitchFamily="34" charset="0"/>
-                <a:ea typeface="Malgun Gothic" pitchFamily="34" charset="-122"/>
-                <a:cs typeface="Malgun Gothic" pitchFamily="34" charset="-120"/>
-              </a:rPr>
-              <a:t>증명</a:t>
-            </a:r>
-            <a:endParaRPr lang="en-US" sz="1200" dirty="0"/>
-          </a:p>
-        </p:txBody>
-      </p:sp>
-      <p:sp>
-        <p:nvSpPr>
-          <p:cNvPr id="65" name="Shape 57"/>
-          <p:cNvSpPr/>
-          <p:nvPr/>
-        </p:nvSpPr>
-        <p:spPr>
-          <a:xfrm>
-            <a:off x="9866376" y="4764024"/>
-            <a:ext cx="128016" cy="128016"/>
-          </a:xfrm>
-          <a:prstGeom prst="ellipse">
-            <a:avLst/>
-          </a:prstGeom>
-          <a:solidFill>
-            <a:srgbClr val="02A878"/>
-          </a:solidFill>
-          <a:ln/>
-        </p:spPr>
-      </p:sp>
-      <p:sp>
-        <p:nvSpPr>
-          <p:cNvPr id="66" name="Text 58"/>
-          <p:cNvSpPr/>
-          <p:nvPr/>
-        </p:nvSpPr>
-        <p:spPr>
-          <a:xfrm>
-            <a:off x="9381744" y="4956048"/>
-            <a:ext cx="1097280" cy="475488"/>
-          </a:xfrm>
-          <a:prstGeom prst="rect">
-            <a:avLst/>
-          </a:prstGeom>
-          <a:noFill/>
-          <a:ln/>
-        </p:spPr>
-        <p:txBody>
-          <a:bodyPr wrap="square" lIns="0" tIns="0" rIns="0" bIns="0" rtlCol="0" anchor="ctr"/>
-          <a:lstStyle/>
-          <a:p>
-            <a:pPr algn="ctr" indent="0" marL="0">
-              <a:lnSpc>
-                <a:spcPct val="100000"/>
-              </a:lnSpc>
-              <a:buNone/>
-            </a:pPr>
-            <a:r>
-              <a:rPr lang="en-US" sz="1200" b="1" dirty="0">
-                <a:solidFill>
-                  <a:srgbClr val="17313B"/>
-                </a:solidFill>
-                <a:latin typeface="Malgun Gothic" pitchFamily="34" charset="0"/>
-                <a:ea typeface="Malgun Gothic" pitchFamily="34" charset="-122"/>
-                <a:cs typeface="Malgun Gothic" pitchFamily="34" charset="-120"/>
-              </a:rPr>
-              <a:t>1년</a:t>
-            </a:r>
-            <a:endParaRPr lang="en-US" sz="1200" dirty="0"/>
-          </a:p>
-          <a:p>
-            <a:pPr algn="ctr" indent="0" marL="0">
-              <a:lnSpc>
-                <a:spcPct val="100000"/>
-              </a:lnSpc>
-              <a:buNone/>
-            </a:pPr>
-            <a:r>
-              <a:rPr lang="en-US" sz="1200" b="1" dirty="0">
-                <a:solidFill>
-                  <a:srgbClr val="17313B"/>
-                </a:solidFill>
-                <a:latin typeface="Malgun Gothic" pitchFamily="34" charset="0"/>
-                <a:ea typeface="Malgun Gothic" pitchFamily="34" charset="-122"/>
-                <a:cs typeface="Malgun Gothic" pitchFamily="34" charset="-120"/>
-              </a:rPr>
-              <a:t>제도화</a:t>
-            </a:r>
-            <a:endParaRPr lang="en-US" sz="1200" dirty="0"/>
-          </a:p>
-        </p:txBody>
-      </p:sp>
-      <p:sp>
-        <p:nvSpPr>
-          <p:cNvPr id="67" name="Shape 59"/>
-          <p:cNvSpPr/>
-          <p:nvPr/>
-        </p:nvSpPr>
-        <p:spPr>
-          <a:xfrm>
-            <a:off x="11100816" y="4764024"/>
-            <a:ext cx="128016" cy="128016"/>
-          </a:xfrm>
-          <a:prstGeom prst="ellipse">
-            <a:avLst/>
-          </a:prstGeom>
-          <a:solidFill>
-            <a:srgbClr val="02A878"/>
-          </a:solidFill>
-          <a:ln/>
-        </p:spPr>
-      </p:sp>
-      <p:sp>
-        <p:nvSpPr>
-          <p:cNvPr id="68" name="Text 60"/>
-          <p:cNvSpPr/>
-          <p:nvPr/>
-        </p:nvSpPr>
-        <p:spPr>
-          <a:xfrm>
-            <a:off x="10616184" y="4956048"/>
-            <a:ext cx="1097280" cy="475488"/>
-          </a:xfrm>
-          <a:prstGeom prst="rect">
-            <a:avLst/>
-          </a:prstGeom>
-          <a:noFill/>
-          <a:ln/>
-        </p:spPr>
-        <p:txBody>
-          <a:bodyPr wrap="square" lIns="0" tIns="0" rIns="0" bIns="0" rtlCol="0" anchor="ctr"/>
-          <a:lstStyle/>
-          <a:p>
-            <a:pPr algn="ctr" indent="0" marL="0">
-              <a:lnSpc>
-                <a:spcPct val="100000"/>
-              </a:lnSpc>
-              <a:buNone/>
-            </a:pPr>
-            <a:r>
-              <a:rPr lang="en-US" sz="1200" b="1" dirty="0">
-                <a:solidFill>
-                  <a:srgbClr val="17313B"/>
-                </a:solidFill>
-                <a:latin typeface="Malgun Gothic" pitchFamily="34" charset="0"/>
-                <a:ea typeface="Malgun Gothic" pitchFamily="34" charset="-122"/>
-                <a:cs typeface="Malgun Gothic" pitchFamily="34" charset="-120"/>
-              </a:rPr>
-              <a:t>3년</a:t>
-            </a:r>
-            <a:endParaRPr lang="en-US" sz="1200" dirty="0"/>
-          </a:p>
-          <a:p>
-            <a:pPr algn="ctr" indent="0" marL="0">
-              <a:lnSpc>
-                <a:spcPct val="100000"/>
-              </a:lnSpc>
-              <a:buNone/>
-            </a:pPr>
-            <a:r>
-              <a:rPr lang="en-US" sz="1200" b="1" dirty="0">
-                <a:solidFill>
-                  <a:srgbClr val="17313B"/>
-                </a:solidFill>
-                <a:latin typeface="Malgun Gothic" pitchFamily="34" charset="0"/>
-                <a:ea typeface="Malgun Gothic" pitchFamily="34" charset="-122"/>
-                <a:cs typeface="Malgun Gothic" pitchFamily="34" charset="-120"/>
-              </a:rPr>
-              <a:t>표준화</a:t>
-            </a:r>
-            <a:endParaRPr lang="en-US" sz="1200" dirty="0"/>
-          </a:p>
-        </p:txBody>
-      </p:sp>
-      <p:sp>
-        <p:nvSpPr>
-          <p:cNvPr id="69" name="Text 61"/>
+              <a:rPr lang="en-US" sz="1050" dirty="0">
+                <a:solidFill>
+                  <a:srgbClr val="5A7184"/>
+                </a:solidFill>
+                <a:latin typeface="Malgun Gothic" pitchFamily="34" charset="0"/>
+                <a:ea typeface="Malgun Gothic" pitchFamily="34" charset="-122"/>
+                <a:cs typeface="Malgun Gothic" pitchFamily="34" charset="-120"/>
+              </a:rPr>
+              <a:t>고객과 기술 생태계 공동 설계</a:t>
+            </a:r>
+            <a:endParaRPr lang="en-US" sz="1300" dirty="0"/>
+          </a:p>
+        </p:txBody>
+      </p:sp>
+      <p:sp>
+        <p:nvSpPr>
+          <p:cNvPr id="72" name="Text 63"/>
           <p:cNvSpPr/>
           <p:nvPr/>
         </p:nvSpPr>
@@ -3370,7 +3483,7 @@
             <a:r>
               <a:rPr lang="en-US" sz="2400" b="1" dirty="0">
                 <a:solidFill>
-                  <a:srgbClr val="028090"/>
+                  <a:srgbClr val="17313B"/>
                 </a:solidFill>
                 <a:latin typeface="Malgun Gothic" pitchFamily="34" charset="0"/>
                 <a:ea typeface="Malgun Gothic" pitchFamily="34" charset="-122"/>
@@ -3384,7 +3497,7 @@
       </p:sp>
       <p:sp>
         <p:nvSpPr>
-          <p:cNvPr id="70" name="Text 62"/>
+          <p:cNvPr id="73" name="Text 64"/>
           <p:cNvSpPr/>
           <p:nvPr/>
         </p:nvSpPr>
@@ -3423,7 +3536,7 @@
       </p:sp>
       <p:sp>
         <p:nvSpPr>
-          <p:cNvPr id="71" name="Text 63"/>
+          <p:cNvPr id="74" name="Text 65"/>
           <p:cNvSpPr/>
           <p:nvPr/>
         </p:nvSpPr>
@@ -3448,7 +3561,7 @@
             <a:r>
               <a:rPr lang="en-US" sz="2400" b="1" dirty="0">
                 <a:solidFill>
-                  <a:srgbClr val="028090"/>
+                  <a:srgbClr val="17313B"/>
                 </a:solidFill>
                 <a:latin typeface="Malgun Gothic" pitchFamily="34" charset="0"/>
                 <a:ea typeface="Malgun Gothic" pitchFamily="34" charset="-122"/>
@@ -3462,7 +3575,7 @@
       </p:sp>
       <p:sp>
         <p:nvSpPr>
-          <p:cNvPr id="72" name="Text 64"/>
+          <p:cNvPr id="75" name="Text 66"/>
           <p:cNvSpPr/>
           <p:nvPr/>
         </p:nvSpPr>
@@ -3501,7 +3614,7 @@
       </p:sp>
       <p:sp>
         <p:nvSpPr>
-          <p:cNvPr id="73" name="Text 65"/>
+          <p:cNvPr id="76" name="Text 67"/>
           <p:cNvSpPr/>
           <p:nvPr/>
         </p:nvSpPr>
@@ -3526,7 +3639,7 @@
             <a:r>
               <a:rPr lang="en-US" sz="2400" b="1" dirty="0">
                 <a:solidFill>
-                  <a:srgbClr val="028090"/>
+                  <a:srgbClr val="17313B"/>
                 </a:solidFill>
                 <a:latin typeface="Malgun Gothic" pitchFamily="34" charset="0"/>
                 <a:ea typeface="Malgun Gothic" pitchFamily="34" charset="-122"/>
@@ -3540,7 +3653,7 @@
       </p:sp>
       <p:sp>
         <p:nvSpPr>
-          <p:cNvPr id="74" name="Text 66"/>
+          <p:cNvPr id="77" name="Text 68"/>
           <p:cNvSpPr/>
           <p:nvPr/>
         </p:nvSpPr>
@@ -3579,7 +3692,7 @@
       </p:sp>
       <p:sp>
         <p:nvSpPr>
-          <p:cNvPr id="75" name="Text 67"/>
+          <p:cNvPr id="78" name="Text 69"/>
           <p:cNvSpPr/>
           <p:nvPr/>
         </p:nvSpPr>
@@ -3604,7 +3717,7 @@
             <a:r>
               <a:rPr lang="en-US" sz="2400" b="1" dirty="0">
                 <a:solidFill>
-                  <a:srgbClr val="028090"/>
+                  <a:srgbClr val="17313B"/>
                 </a:solidFill>
                 <a:latin typeface="Malgun Gothic" pitchFamily="34" charset="0"/>
                 <a:ea typeface="Malgun Gothic" pitchFamily="34" charset="-122"/>
@@ -3618,7 +3731,7 @@
       </p:sp>
       <p:sp>
         <p:nvSpPr>
-          <p:cNvPr id="76" name="Text 68"/>
+          <p:cNvPr id="79" name="Text 70"/>
           <p:cNvSpPr/>
           <p:nvPr/>
         </p:nvSpPr>
@@ -3657,7 +3770,7 @@
       </p:sp>
       <p:sp>
         <p:nvSpPr>
-          <p:cNvPr id="77" name="Text 69"/>
+          <p:cNvPr id="80" name="Text 71"/>
           <p:cNvSpPr/>
           <p:nvPr/>
         </p:nvSpPr>
@@ -3682,7 +3795,7 @@
             <a:r>
               <a:rPr lang="en-US" sz="2400" b="1" dirty="0">
                 <a:solidFill>
-                  <a:srgbClr val="028090"/>
+                  <a:srgbClr val="02A878"/>
                 </a:solidFill>
                 <a:latin typeface="Malgun Gothic" pitchFamily="34" charset="0"/>
                 <a:ea typeface="Malgun Gothic" pitchFamily="34" charset="-122"/>
@@ -3696,7 +3809,7 @@
       </p:sp>
       <p:sp>
         <p:nvSpPr>
-          <p:cNvPr id="78" name="Text 70"/>
+          <p:cNvPr id="81" name="Text 72"/>
           <p:cNvSpPr/>
           <p:nvPr/>
         </p:nvSpPr>

--- a/dashboard/public/downloads/dev-transformation-summary-high.pptx
+++ b/dashboard/public/downloads/dev-transformation-summary-high.pptx
@@ -1036,8 +1036,8 @@
         </p:nvSpPr>
         <p:spPr>
           <a:xfrm>
-            <a:off x="457200" y="841248"/>
-            <a:ext cx="11274552" cy="292608"/>
+            <a:off x="457200" y="804672"/>
+            <a:ext cx="11274552" cy="246888"/>
           </a:xfrm>
           <a:prstGeom prst="rect">
             <a:avLst/>
@@ -1083,14 +1083,67 @@
       </p:sp>
       <p:sp>
         <p:nvSpPr>
-          <p:cNvPr id="7" name="Shape 5"/>
-          <p:cNvSpPr/>
-          <p:nvPr/>
-        </p:nvSpPr>
-        <p:spPr>
-          <a:xfrm>
-            <a:off x="457200" y="1207008"/>
-            <a:ext cx="3602736" cy="4297680"/>
+          <p:cNvPr id="7" name="Text 5"/>
+          <p:cNvSpPr/>
+          <p:nvPr/>
+        </p:nvSpPr>
+        <p:spPr>
+          <a:xfrm>
+            <a:off x="457200" y="1051560"/>
+            <a:ext cx="11274552" cy="246888"/>
+          </a:xfrm>
+          <a:prstGeom prst="rect">
+            <a:avLst/>
+          </a:prstGeom>
+          <a:noFill/>
+          <a:ln/>
+        </p:spPr>
+        <p:txBody>
+          <a:bodyPr wrap="square" lIns="0" tIns="0" rIns="0" bIns="0" rtlCol="0" anchor="ctr"/>
+          <a:lstStyle/>
+          <a:p>
+            <a:pPr indent="0" marL="0">
+              <a:buNone/>
+            </a:pPr>
+            <a:r>
+              <a:rPr lang="en-US" sz="1300" b="1" dirty="0">
+                <a:solidFill>
+                  <a:srgbClr val="02A878"/>
+                </a:solidFill>
+                <a:latin typeface="Malgun Gothic" pitchFamily="34" charset="0"/>
+                <a:ea typeface="Malgun Gothic" pitchFamily="34" charset="-122"/>
+                <a:cs typeface="Malgun Gothic" pitchFamily="34" charset="-120"/>
+              </a:rPr>
+              <a:t>호명사회  </a:t>
+            </a:r>
+            <a:pPr indent="0" marL="0">
+              <a:buNone/>
+            </a:pPr>
+            <a:r>
+              <a:rPr lang="en-US" sz="1300" i="1" dirty="0">
+                <a:solidFill>
+                  <a:srgbClr val="5A7184"/>
+                </a:solidFill>
+                <a:latin typeface="Malgun Gothic" pitchFamily="34" charset="0"/>
+                <a:ea typeface="Malgun Gothic" pitchFamily="34" charset="-122"/>
+                <a:cs typeface="Malgun Gothic" pitchFamily="34" charset="-120"/>
+              </a:rPr>
+              <a:t>“조직의 이름 뒤에 숨지 않고, 자신의 이름으로 불리며 책임과 결과를 마주한다” — 송길영 『시대예보: 호명사회』</a:t>
+            </a:r>
+            <a:endParaRPr lang="en-US" sz="1300" dirty="0"/>
+          </a:p>
+        </p:txBody>
+      </p:sp>
+      <p:sp>
+        <p:nvSpPr>
+          <p:cNvPr id="8" name="Shape 6"/>
+          <p:cNvSpPr/>
+          <p:nvPr/>
+        </p:nvSpPr>
+        <p:spPr>
+          <a:xfrm>
+            <a:off x="457200" y="1389888"/>
+            <a:ext cx="3602736" cy="4114800"/>
           </a:xfrm>
           <a:prstGeom prst="roundRect">
             <a:avLst>
@@ -1105,13 +1158,13 @@
       </p:sp>
       <p:sp>
         <p:nvSpPr>
-          <p:cNvPr id="8" name="Text 6"/>
-          <p:cNvSpPr/>
-          <p:nvPr/>
-        </p:nvSpPr>
-        <p:spPr>
-          <a:xfrm>
-            <a:off x="640080" y="1371600"/>
+          <p:cNvPr id="9" name="Text 7"/>
+          <p:cNvSpPr/>
+          <p:nvPr/>
+        </p:nvSpPr>
+        <p:spPr>
+          <a:xfrm>
+            <a:off x="640080" y="1554480"/>
             <a:ext cx="329184" cy="329184"/>
           </a:xfrm>
           <a:prstGeom prst="ellipse">
@@ -1146,13 +1199,13 @@
       </p:sp>
       <p:sp>
         <p:nvSpPr>
-          <p:cNvPr id="9" name="Text 7"/>
-          <p:cNvSpPr/>
-          <p:nvPr/>
-        </p:nvSpPr>
-        <p:spPr>
-          <a:xfrm>
-            <a:off x="1060704" y="1344168"/>
+          <p:cNvPr id="10" name="Text 8"/>
+          <p:cNvSpPr/>
+          <p:nvPr/>
+        </p:nvSpPr>
+        <p:spPr>
+          <a:xfrm>
+            <a:off x="1060704" y="1527048"/>
             <a:ext cx="2871216" cy="384048"/>
           </a:xfrm>
           <a:prstGeom prst="rect">
@@ -1185,14 +1238,14 @@
       </p:sp>
       <p:sp>
         <p:nvSpPr>
-          <p:cNvPr id="10" name="Shape 8"/>
-          <p:cNvSpPr/>
-          <p:nvPr/>
-        </p:nvSpPr>
-        <p:spPr>
-          <a:xfrm>
-            <a:off x="4297680" y="1207008"/>
-            <a:ext cx="3602736" cy="4297680"/>
+          <p:cNvPr id="11" name="Shape 9"/>
+          <p:cNvSpPr/>
+          <p:nvPr/>
+        </p:nvSpPr>
+        <p:spPr>
+          <a:xfrm>
+            <a:off x="4297680" y="1389888"/>
+            <a:ext cx="3602736" cy="4114800"/>
           </a:xfrm>
           <a:prstGeom prst="roundRect">
             <a:avLst>
@@ -1207,13 +1260,13 @@
       </p:sp>
       <p:sp>
         <p:nvSpPr>
-          <p:cNvPr id="11" name="Text 9"/>
-          <p:cNvSpPr/>
-          <p:nvPr/>
-        </p:nvSpPr>
-        <p:spPr>
-          <a:xfrm>
-            <a:off x="4480560" y="1371600"/>
+          <p:cNvPr id="12" name="Text 10"/>
+          <p:cNvSpPr/>
+          <p:nvPr/>
+        </p:nvSpPr>
+        <p:spPr>
+          <a:xfrm>
+            <a:off x="4480560" y="1554480"/>
             <a:ext cx="329184" cy="329184"/>
           </a:xfrm>
           <a:prstGeom prst="ellipse">
@@ -1248,13 +1301,13 @@
       </p:sp>
       <p:sp>
         <p:nvSpPr>
-          <p:cNvPr id="12" name="Text 10"/>
-          <p:cNvSpPr/>
-          <p:nvPr/>
-        </p:nvSpPr>
-        <p:spPr>
-          <a:xfrm>
-            <a:off x="4901184" y="1344168"/>
+          <p:cNvPr id="13" name="Text 11"/>
+          <p:cNvSpPr/>
+          <p:nvPr/>
+        </p:nvSpPr>
+        <p:spPr>
+          <a:xfrm>
+            <a:off x="4901184" y="1527048"/>
             <a:ext cx="2871216" cy="384048"/>
           </a:xfrm>
           <a:prstGeom prst="rect">
@@ -1287,14 +1340,14 @@
       </p:sp>
       <p:sp>
         <p:nvSpPr>
-          <p:cNvPr id="13" name="Shape 11"/>
-          <p:cNvSpPr/>
-          <p:nvPr/>
-        </p:nvSpPr>
-        <p:spPr>
-          <a:xfrm>
-            <a:off x="8129016" y="1207008"/>
-            <a:ext cx="3602736" cy="4297680"/>
+          <p:cNvPr id="14" name="Shape 12"/>
+          <p:cNvSpPr/>
+          <p:nvPr/>
+        </p:nvSpPr>
+        <p:spPr>
+          <a:xfrm>
+            <a:off x="8129016" y="1389888"/>
+            <a:ext cx="3602736" cy="4114800"/>
           </a:xfrm>
           <a:prstGeom prst="roundRect">
             <a:avLst>
@@ -1309,13 +1362,13 @@
       </p:sp>
       <p:sp>
         <p:nvSpPr>
-          <p:cNvPr id="14" name="Text 12"/>
-          <p:cNvSpPr/>
-          <p:nvPr/>
-        </p:nvSpPr>
-        <p:spPr>
-          <a:xfrm>
-            <a:off x="8311896" y="1371600"/>
+          <p:cNvPr id="15" name="Text 13"/>
+          <p:cNvSpPr/>
+          <p:nvPr/>
+        </p:nvSpPr>
+        <p:spPr>
+          <a:xfrm>
+            <a:off x="8311896" y="1554480"/>
             <a:ext cx="329184" cy="329184"/>
           </a:xfrm>
           <a:prstGeom prst="ellipse">
@@ -1350,13 +1403,13 @@
       </p:sp>
       <p:sp>
         <p:nvSpPr>
-          <p:cNvPr id="15" name="Text 13"/>
-          <p:cNvSpPr/>
-          <p:nvPr/>
-        </p:nvSpPr>
-        <p:spPr>
-          <a:xfrm>
-            <a:off x="8732520" y="1344168"/>
+          <p:cNvPr id="16" name="Text 14"/>
+          <p:cNvSpPr/>
+          <p:nvPr/>
+        </p:nvSpPr>
+        <p:spPr>
+          <a:xfrm>
+            <a:off x="8732520" y="1527048"/>
             <a:ext cx="2871216" cy="384048"/>
           </a:xfrm>
           <a:prstGeom prst="rect">
@@ -1389,7 +1442,7 @@
       </p:sp>
       <p:sp>
         <p:nvSpPr>
-          <p:cNvPr id="16" name="Shape 14"/>
+          <p:cNvPr id="17" name="Shape 15"/>
           <p:cNvSpPr/>
           <p:nvPr/>
         </p:nvSpPr>
@@ -1412,7 +1465,7 @@
       </p:sp>
       <p:sp>
         <p:nvSpPr>
-          <p:cNvPr id="17" name="Shape 15"/>
+          <p:cNvPr id="18" name="Shape 16"/>
           <p:cNvSpPr/>
           <p:nvPr/>
         </p:nvSpPr>
@@ -1432,7 +1485,7 @@
       </p:sp>
       <p:sp>
         <p:nvSpPr>
-          <p:cNvPr id="18" name="Text 16"/>
+          <p:cNvPr id="19" name="Text 17"/>
           <p:cNvSpPr/>
           <p:nvPr/>
         </p:nvSpPr>
@@ -1471,7 +1524,7 @@
       </p:sp>
       <p:sp>
         <p:nvSpPr>
-          <p:cNvPr id="19" name="Text 17"/>
+          <p:cNvPr id="20" name="Text 18"/>
           <p:cNvSpPr/>
           <p:nvPr/>
         </p:nvSpPr>
@@ -1533,7 +1586,7 @@
       </p:sp>
       <p:sp>
         <p:nvSpPr>
-          <p:cNvPr id="20" name="Shape 18"/>
+          <p:cNvPr id="21" name="Shape 19"/>
           <p:cNvSpPr/>
           <p:nvPr/>
         </p:nvSpPr>
@@ -1553,7 +1606,7 @@
       </p:sp>
       <p:sp>
         <p:nvSpPr>
-          <p:cNvPr id="21" name="Text 19"/>
+          <p:cNvPr id="22" name="Text 20"/>
           <p:cNvSpPr/>
           <p:nvPr/>
         </p:nvSpPr>
@@ -1592,7 +1645,7 @@
       </p:sp>
       <p:sp>
         <p:nvSpPr>
-          <p:cNvPr id="22" name="Text 20"/>
+          <p:cNvPr id="23" name="Text 21"/>
           <p:cNvSpPr/>
           <p:nvPr/>
         </p:nvSpPr>
@@ -1654,7 +1707,7 @@
       </p:sp>
       <p:sp>
         <p:nvSpPr>
-          <p:cNvPr id="23" name="Shape 21"/>
+          <p:cNvPr id="24" name="Shape 22"/>
           <p:cNvSpPr/>
           <p:nvPr/>
         </p:nvSpPr>
@@ -1674,7 +1727,7 @@
       </p:sp>
       <p:sp>
         <p:nvSpPr>
-          <p:cNvPr id="24" name="Text 22"/>
+          <p:cNvPr id="25" name="Text 23"/>
           <p:cNvSpPr/>
           <p:nvPr/>
         </p:nvSpPr>
@@ -1713,7 +1766,7 @@
       </p:sp>
       <p:sp>
         <p:nvSpPr>
-          <p:cNvPr id="25" name="Text 23"/>
+          <p:cNvPr id="26" name="Text 24"/>
           <p:cNvSpPr/>
           <p:nvPr/>
         </p:nvSpPr>
@@ -1775,7 +1828,7 @@
       </p:sp>
       <p:sp>
         <p:nvSpPr>
-          <p:cNvPr id="26" name="Shape 24"/>
+          <p:cNvPr id="27" name="Shape 25"/>
           <p:cNvSpPr/>
           <p:nvPr/>
         </p:nvSpPr>
@@ -1802,7 +1855,7 @@
       </p:sp>
       <p:pic>
         <p:nvPicPr>
-          <p:cNvPr id="27" name="Image 0" descr="preencoded.png">    </p:cNvPr>
+          <p:cNvPr id="28" name="Image 0" descr="preencoded.png">    </p:cNvPr>
           <p:cNvPicPr>
             <a:picLocks noChangeAspect="1"/>
           </p:cNvPicPr>
@@ -1826,7 +1879,7 @@
       </p:pic>
       <p:sp>
         <p:nvSpPr>
-          <p:cNvPr id="28" name="Text 25"/>
+          <p:cNvPr id="29" name="Text 26"/>
           <p:cNvSpPr/>
           <p:nvPr/>
         </p:nvSpPr>
@@ -1888,13 +1941,13 @@
       </p:sp>
       <p:sp>
         <p:nvSpPr>
-          <p:cNvPr id="29" name="Text 26"/>
-          <p:cNvSpPr/>
-          <p:nvPr/>
-        </p:nvSpPr>
-        <p:spPr>
-          <a:xfrm>
-            <a:off x="4517136" y="1883664"/>
+          <p:cNvPr id="30" name="Text 27"/>
+          <p:cNvSpPr/>
+          <p:nvPr/>
+        </p:nvSpPr>
+        <p:spPr>
+          <a:xfrm>
+            <a:off x="4517136" y="1956816"/>
             <a:ext cx="1371600" cy="237744"/>
           </a:xfrm>
           <a:prstGeom prst="rect">
@@ -1927,13 +1980,13 @@
       </p:sp>
       <p:sp>
         <p:nvSpPr>
-          <p:cNvPr id="30" name="Text 27"/>
-          <p:cNvSpPr/>
-          <p:nvPr/>
-        </p:nvSpPr>
-        <p:spPr>
-          <a:xfrm>
-            <a:off x="6181344" y="1883664"/>
+          <p:cNvPr id="31" name="Text 28"/>
+          <p:cNvSpPr/>
+          <p:nvPr/>
+        </p:nvSpPr>
+        <p:spPr>
+          <a:xfrm>
+            <a:off x="6181344" y="1956816"/>
             <a:ext cx="1463040" cy="237744"/>
           </a:xfrm>
           <a:prstGeom prst="rect">
@@ -1966,13 +2019,13 @@
       </p:sp>
       <p:sp>
         <p:nvSpPr>
-          <p:cNvPr id="31" name="Text 28"/>
-          <p:cNvSpPr/>
-          <p:nvPr/>
-        </p:nvSpPr>
-        <p:spPr>
-          <a:xfrm>
-            <a:off x="4517136" y="2157984"/>
+          <p:cNvPr id="32" name="Text 29"/>
+          <p:cNvSpPr/>
+          <p:nvPr/>
+        </p:nvSpPr>
+        <p:spPr>
+          <a:xfrm>
+            <a:off x="4517136" y="2231136"/>
             <a:ext cx="1371600" cy="475488"/>
           </a:xfrm>
           <a:prstGeom prst="roundRect">
@@ -2013,13 +2066,13 @@
       </p:sp>
       <p:sp>
         <p:nvSpPr>
-          <p:cNvPr id="32" name="Text 29"/>
-          <p:cNvSpPr/>
-          <p:nvPr/>
-        </p:nvSpPr>
-        <p:spPr>
-          <a:xfrm>
-            <a:off x="5888736" y="2157984"/>
+          <p:cNvPr id="33" name="Text 30"/>
+          <p:cNvSpPr/>
+          <p:nvPr/>
+        </p:nvSpPr>
+        <p:spPr>
+          <a:xfrm>
+            <a:off x="5888736" y="2231136"/>
             <a:ext cx="292608" cy="475488"/>
           </a:xfrm>
           <a:prstGeom prst="rect">
@@ -2052,13 +2105,13 @@
       </p:sp>
       <p:sp>
         <p:nvSpPr>
-          <p:cNvPr id="33" name="Text 30"/>
-          <p:cNvSpPr/>
-          <p:nvPr/>
-        </p:nvSpPr>
-        <p:spPr>
-          <a:xfrm>
-            <a:off x="6181344" y="2157984"/>
+          <p:cNvPr id="34" name="Text 31"/>
+          <p:cNvSpPr/>
+          <p:nvPr/>
+        </p:nvSpPr>
+        <p:spPr>
+          <a:xfrm>
+            <a:off x="6181344" y="2231136"/>
             <a:ext cx="1499616" cy="475488"/>
           </a:xfrm>
           <a:prstGeom prst="roundRect">
@@ -2099,13 +2152,13 @@
       </p:sp>
       <p:sp>
         <p:nvSpPr>
-          <p:cNvPr id="34" name="Text 31"/>
-          <p:cNvSpPr/>
-          <p:nvPr/>
-        </p:nvSpPr>
-        <p:spPr>
-          <a:xfrm>
-            <a:off x="4517136" y="2761488"/>
+          <p:cNvPr id="35" name="Text 32"/>
+          <p:cNvSpPr/>
+          <p:nvPr/>
+        </p:nvSpPr>
+        <p:spPr>
+          <a:xfrm>
+            <a:off x="4517136" y="2807208"/>
             <a:ext cx="1371600" cy="475488"/>
           </a:xfrm>
           <a:prstGeom prst="roundRect">
@@ -2146,13 +2199,13 @@
       </p:sp>
       <p:sp>
         <p:nvSpPr>
-          <p:cNvPr id="35" name="Text 32"/>
-          <p:cNvSpPr/>
-          <p:nvPr/>
-        </p:nvSpPr>
-        <p:spPr>
-          <a:xfrm>
-            <a:off x="5888736" y="2761488"/>
+          <p:cNvPr id="36" name="Text 33"/>
+          <p:cNvSpPr/>
+          <p:nvPr/>
+        </p:nvSpPr>
+        <p:spPr>
+          <a:xfrm>
+            <a:off x="5888736" y="2807208"/>
             <a:ext cx="292608" cy="475488"/>
           </a:xfrm>
           <a:prstGeom prst="rect">
@@ -2185,13 +2238,13 @@
       </p:sp>
       <p:sp>
         <p:nvSpPr>
-          <p:cNvPr id="36" name="Text 33"/>
-          <p:cNvSpPr/>
-          <p:nvPr/>
-        </p:nvSpPr>
-        <p:spPr>
-          <a:xfrm>
-            <a:off x="6181344" y="2761488"/>
+          <p:cNvPr id="37" name="Text 34"/>
+          <p:cNvSpPr/>
+          <p:nvPr/>
+        </p:nvSpPr>
+        <p:spPr>
+          <a:xfrm>
+            <a:off x="6181344" y="2807208"/>
             <a:ext cx="1499616" cy="475488"/>
           </a:xfrm>
           <a:prstGeom prst="roundRect">
@@ -2232,13 +2285,13 @@
       </p:sp>
       <p:sp>
         <p:nvSpPr>
-          <p:cNvPr id="37" name="Text 34"/>
-          <p:cNvSpPr/>
-          <p:nvPr/>
-        </p:nvSpPr>
-        <p:spPr>
-          <a:xfrm>
-            <a:off x="4517136" y="3364992"/>
+          <p:cNvPr id="38" name="Text 35"/>
+          <p:cNvSpPr/>
+          <p:nvPr/>
+        </p:nvSpPr>
+        <p:spPr>
+          <a:xfrm>
+            <a:off x="4517136" y="3383280"/>
             <a:ext cx="1371600" cy="475488"/>
           </a:xfrm>
           <a:prstGeom prst="roundRect">
@@ -2279,13 +2332,13 @@
       </p:sp>
       <p:sp>
         <p:nvSpPr>
-          <p:cNvPr id="38" name="Text 35"/>
-          <p:cNvSpPr/>
-          <p:nvPr/>
-        </p:nvSpPr>
-        <p:spPr>
-          <a:xfrm>
-            <a:off x="5888736" y="3364992"/>
+          <p:cNvPr id="39" name="Text 36"/>
+          <p:cNvSpPr/>
+          <p:nvPr/>
+        </p:nvSpPr>
+        <p:spPr>
+          <a:xfrm>
+            <a:off x="5888736" y="3383280"/>
             <a:ext cx="292608" cy="475488"/>
           </a:xfrm>
           <a:prstGeom prst="rect">
@@ -2318,13 +2371,13 @@
       </p:sp>
       <p:sp>
         <p:nvSpPr>
-          <p:cNvPr id="39" name="Text 36"/>
-          <p:cNvSpPr/>
-          <p:nvPr/>
-        </p:nvSpPr>
-        <p:spPr>
-          <a:xfrm>
-            <a:off x="6181344" y="3364992"/>
+          <p:cNvPr id="40" name="Text 37"/>
+          <p:cNvSpPr/>
+          <p:nvPr/>
+        </p:nvSpPr>
+        <p:spPr>
+          <a:xfrm>
+            <a:off x="6181344" y="3383280"/>
             <a:ext cx="1499616" cy="475488"/>
           </a:xfrm>
           <a:prstGeom prst="roundRect">
@@ -2365,13 +2418,13 @@
       </p:sp>
       <p:sp>
         <p:nvSpPr>
-          <p:cNvPr id="40" name="Text 37"/>
-          <p:cNvSpPr/>
-          <p:nvPr/>
-        </p:nvSpPr>
-        <p:spPr>
-          <a:xfrm>
-            <a:off x="4517136" y="3968496"/>
+          <p:cNvPr id="41" name="Text 38"/>
+          <p:cNvSpPr/>
+          <p:nvPr/>
+        </p:nvSpPr>
+        <p:spPr>
+          <a:xfrm>
+            <a:off x="4517136" y="3959352"/>
             <a:ext cx="1371600" cy="475488"/>
           </a:xfrm>
           <a:prstGeom prst="roundRect">
@@ -2412,13 +2465,13 @@
       </p:sp>
       <p:sp>
         <p:nvSpPr>
-          <p:cNvPr id="41" name="Text 38"/>
-          <p:cNvSpPr/>
-          <p:nvPr/>
-        </p:nvSpPr>
-        <p:spPr>
-          <a:xfrm>
-            <a:off x="5888736" y="3968496"/>
+          <p:cNvPr id="42" name="Text 39"/>
+          <p:cNvSpPr/>
+          <p:nvPr/>
+        </p:nvSpPr>
+        <p:spPr>
+          <a:xfrm>
+            <a:off x="5888736" y="3959352"/>
             <a:ext cx="292608" cy="475488"/>
           </a:xfrm>
           <a:prstGeom prst="rect">
@@ -2451,13 +2504,13 @@
       </p:sp>
       <p:sp>
         <p:nvSpPr>
-          <p:cNvPr id="42" name="Text 39"/>
-          <p:cNvSpPr/>
-          <p:nvPr/>
-        </p:nvSpPr>
-        <p:spPr>
-          <a:xfrm>
-            <a:off x="6181344" y="3968496"/>
+          <p:cNvPr id="43" name="Text 40"/>
+          <p:cNvSpPr/>
+          <p:nvPr/>
+        </p:nvSpPr>
+        <p:spPr>
+          <a:xfrm>
+            <a:off x="6181344" y="3959352"/>
             <a:ext cx="1499616" cy="475488"/>
           </a:xfrm>
           <a:prstGeom prst="roundRect">
@@ -2498,7 +2551,7 @@
       </p:sp>
       <p:sp>
         <p:nvSpPr>
-          <p:cNvPr id="43" name="Shape 40"/>
+          <p:cNvPr id="44" name="Shape 41"/>
           <p:cNvSpPr/>
           <p:nvPr/>
         </p:nvSpPr>
@@ -2525,7 +2578,7 @@
       </p:sp>
       <p:pic>
         <p:nvPicPr>
-          <p:cNvPr id="44" name="Image 1" descr="preencoded.png">    </p:cNvPr>
+          <p:cNvPr id="45" name="Image 1" descr="preencoded.png">    </p:cNvPr>
           <p:cNvPicPr>
             <a:picLocks noChangeAspect="1"/>
           </p:cNvPicPr>
@@ -2549,7 +2602,7 @@
       </p:pic>
       <p:sp>
         <p:nvSpPr>
-          <p:cNvPr id="45" name="Text 41"/>
+          <p:cNvPr id="46" name="Text 42"/>
           <p:cNvSpPr/>
           <p:nvPr/>
         </p:nvSpPr>
@@ -2588,13 +2641,13 @@
       </p:sp>
       <p:sp>
         <p:nvSpPr>
-          <p:cNvPr id="46" name="Shape 42"/>
-          <p:cNvSpPr/>
-          <p:nvPr/>
-        </p:nvSpPr>
-        <p:spPr>
-          <a:xfrm>
-            <a:off x="8897112" y="1847088"/>
+          <p:cNvPr id="47" name="Shape 43"/>
+          <p:cNvSpPr/>
+          <p:nvPr/>
+        </p:nvSpPr>
+        <p:spPr>
+          <a:xfrm>
+            <a:off x="8897112" y="1956816"/>
             <a:ext cx="402336" cy="402336"/>
           </a:xfrm>
           <a:prstGeom prst="ellipse">
@@ -2608,7 +2661,7 @@
       </p:sp>
       <p:pic>
         <p:nvPicPr>
-          <p:cNvPr id="47" name="Image 2" descr="preencoded.png">    </p:cNvPr>
+          <p:cNvPr id="48" name="Image 2" descr="preencoded.png">    </p:cNvPr>
           <p:cNvPicPr>
             <a:picLocks noChangeAspect="1"/>
           </p:cNvPicPr>
@@ -2622,7 +2675,7 @@
         </p:blipFill>
         <p:spPr>
           <a:xfrm>
-            <a:off x="8993673" y="1943649"/>
+            <a:off x="8993673" y="2053377"/>
             <a:ext cx="209215" cy="209215"/>
           </a:xfrm>
           <a:prstGeom prst="rect">
@@ -2632,13 +2685,13 @@
       </p:pic>
       <p:sp>
         <p:nvSpPr>
-          <p:cNvPr id="48" name="Text 43"/>
-          <p:cNvSpPr/>
-          <p:nvPr/>
-        </p:nvSpPr>
-        <p:spPr>
-          <a:xfrm>
-            <a:off x="8330184" y="2267712"/>
+          <p:cNvPr id="49" name="Text 44"/>
+          <p:cNvSpPr/>
+          <p:nvPr/>
+        </p:nvSpPr>
+        <p:spPr>
+          <a:xfrm>
+            <a:off x="8330184" y="2377440"/>
             <a:ext cx="1536192" cy="274320"/>
           </a:xfrm>
           <a:prstGeom prst="rect">
@@ -2671,13 +2724,13 @@
       </p:sp>
       <p:sp>
         <p:nvSpPr>
-          <p:cNvPr id="49" name="Text 44"/>
-          <p:cNvSpPr/>
-          <p:nvPr/>
-        </p:nvSpPr>
-        <p:spPr>
-          <a:xfrm>
-            <a:off x="8275320" y="2542032"/>
+          <p:cNvPr id="50" name="Text 45"/>
+          <p:cNvSpPr/>
+          <p:nvPr/>
+        </p:nvSpPr>
+        <p:spPr>
+          <a:xfrm>
+            <a:off x="8275320" y="2651760"/>
             <a:ext cx="1645920" cy="219456"/>
           </a:xfrm>
           <a:prstGeom prst="rect">
@@ -2710,13 +2763,13 @@
       </p:sp>
       <p:sp>
         <p:nvSpPr>
-          <p:cNvPr id="50" name="Shape 45"/>
-          <p:cNvSpPr/>
-          <p:nvPr/>
-        </p:nvSpPr>
-        <p:spPr>
-          <a:xfrm>
-            <a:off x="10561320" y="1847088"/>
+          <p:cNvPr id="51" name="Shape 46"/>
+          <p:cNvSpPr/>
+          <p:nvPr/>
+        </p:nvSpPr>
+        <p:spPr>
+          <a:xfrm>
+            <a:off x="10561320" y="1956816"/>
             <a:ext cx="402336" cy="402336"/>
           </a:xfrm>
           <a:prstGeom prst="ellipse">
@@ -2730,7 +2783,7 @@
       </p:sp>
       <p:pic>
         <p:nvPicPr>
-          <p:cNvPr id="51" name="Image 3" descr="preencoded.png">    </p:cNvPr>
+          <p:cNvPr id="52" name="Image 3" descr="preencoded.png">    </p:cNvPr>
           <p:cNvPicPr>
             <a:picLocks noChangeAspect="1"/>
           </p:cNvPicPr>
@@ -2744,7 +2797,7 @@
         </p:blipFill>
         <p:spPr>
           <a:xfrm>
-            <a:off x="10657881" y="1943649"/>
+            <a:off x="10657881" y="2053377"/>
             <a:ext cx="209215" cy="209215"/>
           </a:xfrm>
           <a:prstGeom prst="rect">
@@ -2754,13 +2807,13 @@
       </p:pic>
       <p:sp>
         <p:nvSpPr>
-          <p:cNvPr id="52" name="Text 46"/>
-          <p:cNvSpPr/>
-          <p:nvPr/>
-        </p:nvSpPr>
-        <p:spPr>
-          <a:xfrm>
-            <a:off x="9994392" y="2267712"/>
+          <p:cNvPr id="53" name="Text 47"/>
+          <p:cNvSpPr/>
+          <p:nvPr/>
+        </p:nvSpPr>
+        <p:spPr>
+          <a:xfrm>
+            <a:off x="9994392" y="2377440"/>
             <a:ext cx="1536192" cy="274320"/>
           </a:xfrm>
           <a:prstGeom prst="rect">
@@ -2793,13 +2846,13 @@
       </p:sp>
       <p:sp>
         <p:nvSpPr>
-          <p:cNvPr id="53" name="Text 47"/>
-          <p:cNvSpPr/>
-          <p:nvPr/>
-        </p:nvSpPr>
-        <p:spPr>
-          <a:xfrm>
-            <a:off x="9939528" y="2542032"/>
+          <p:cNvPr id="54" name="Text 48"/>
+          <p:cNvSpPr/>
+          <p:nvPr/>
+        </p:nvSpPr>
+        <p:spPr>
+          <a:xfrm>
+            <a:off x="9939528" y="2651760"/>
             <a:ext cx="1645920" cy="219456"/>
           </a:xfrm>
           <a:prstGeom prst="rect">
@@ -2832,13 +2885,13 @@
       </p:sp>
       <p:sp>
         <p:nvSpPr>
-          <p:cNvPr id="54" name="Shape 48"/>
-          <p:cNvSpPr/>
-          <p:nvPr/>
-        </p:nvSpPr>
-        <p:spPr>
-          <a:xfrm>
-            <a:off x="8897112" y="2907792"/>
+          <p:cNvPr id="55" name="Shape 49"/>
+          <p:cNvSpPr/>
+          <p:nvPr/>
+        </p:nvSpPr>
+        <p:spPr>
+          <a:xfrm>
+            <a:off x="8897112" y="3017520"/>
             <a:ext cx="402336" cy="402336"/>
           </a:xfrm>
           <a:prstGeom prst="ellipse">
@@ -2852,7 +2905,7 @@
       </p:sp>
       <p:pic>
         <p:nvPicPr>
-          <p:cNvPr id="55" name="Image 4" descr="preencoded.png">    </p:cNvPr>
+          <p:cNvPr id="56" name="Image 4" descr="preencoded.png">    </p:cNvPr>
           <p:cNvPicPr>
             <a:picLocks noChangeAspect="1"/>
           </p:cNvPicPr>
@@ -2866,7 +2919,7 @@
         </p:blipFill>
         <p:spPr>
           <a:xfrm>
-            <a:off x="8993673" y="3004353"/>
+            <a:off x="8993673" y="3114081"/>
             <a:ext cx="209215" cy="209215"/>
           </a:xfrm>
           <a:prstGeom prst="rect">
@@ -2876,13 +2929,13 @@
       </p:pic>
       <p:sp>
         <p:nvSpPr>
-          <p:cNvPr id="56" name="Text 49"/>
-          <p:cNvSpPr/>
-          <p:nvPr/>
-        </p:nvSpPr>
-        <p:spPr>
-          <a:xfrm>
-            <a:off x="8330184" y="3328416"/>
+          <p:cNvPr id="57" name="Text 50"/>
+          <p:cNvSpPr/>
+          <p:nvPr/>
+        </p:nvSpPr>
+        <p:spPr>
+          <a:xfrm>
+            <a:off x="8330184" y="3438144"/>
             <a:ext cx="1536192" cy="274320"/>
           </a:xfrm>
           <a:prstGeom prst="rect">
@@ -2915,13 +2968,13 @@
       </p:sp>
       <p:sp>
         <p:nvSpPr>
-          <p:cNvPr id="57" name="Text 50"/>
-          <p:cNvSpPr/>
-          <p:nvPr/>
-        </p:nvSpPr>
-        <p:spPr>
-          <a:xfrm>
-            <a:off x="8275320" y="3602736"/>
+          <p:cNvPr id="58" name="Text 51"/>
+          <p:cNvSpPr/>
+          <p:nvPr/>
+        </p:nvSpPr>
+        <p:spPr>
+          <a:xfrm>
+            <a:off x="8275320" y="3712464"/>
             <a:ext cx="1645920" cy="219456"/>
           </a:xfrm>
           <a:prstGeom prst="rect">
@@ -2954,13 +3007,13 @@
       </p:sp>
       <p:sp>
         <p:nvSpPr>
-          <p:cNvPr id="58" name="Shape 51"/>
-          <p:cNvSpPr/>
-          <p:nvPr/>
-        </p:nvSpPr>
-        <p:spPr>
-          <a:xfrm>
-            <a:off x="10561320" y="2907792"/>
+          <p:cNvPr id="59" name="Shape 52"/>
+          <p:cNvSpPr/>
+          <p:nvPr/>
+        </p:nvSpPr>
+        <p:spPr>
+          <a:xfrm>
+            <a:off x="10561320" y="3017520"/>
             <a:ext cx="402336" cy="402336"/>
           </a:xfrm>
           <a:prstGeom prst="ellipse">
@@ -2974,7 +3027,7 @@
       </p:sp>
       <p:pic>
         <p:nvPicPr>
-          <p:cNvPr id="59" name="Image 5" descr="preencoded.png">    </p:cNvPr>
+          <p:cNvPr id="60" name="Image 5" descr="preencoded.png">    </p:cNvPr>
           <p:cNvPicPr>
             <a:picLocks noChangeAspect="1"/>
           </p:cNvPicPr>
@@ -2988,7 +3041,7 @@
         </p:blipFill>
         <p:spPr>
           <a:xfrm>
-            <a:off x="10657881" y="3004353"/>
+            <a:off x="10657881" y="3114081"/>
             <a:ext cx="209215" cy="209215"/>
           </a:xfrm>
           <a:prstGeom prst="rect">
@@ -2998,13 +3051,13 @@
       </p:pic>
       <p:sp>
         <p:nvSpPr>
-          <p:cNvPr id="60" name="Text 52"/>
-          <p:cNvSpPr/>
-          <p:nvPr/>
-        </p:nvSpPr>
-        <p:spPr>
-          <a:xfrm>
-            <a:off x="9994392" y="3328416"/>
+          <p:cNvPr id="61" name="Text 53"/>
+          <p:cNvSpPr/>
+          <p:nvPr/>
+        </p:nvSpPr>
+        <p:spPr>
+          <a:xfrm>
+            <a:off x="9994392" y="3438144"/>
             <a:ext cx="1536192" cy="274320"/>
           </a:xfrm>
           <a:prstGeom prst="rect">
@@ -3037,13 +3090,13 @@
       </p:sp>
       <p:sp>
         <p:nvSpPr>
-          <p:cNvPr id="61" name="Text 53"/>
-          <p:cNvSpPr/>
-          <p:nvPr/>
-        </p:nvSpPr>
-        <p:spPr>
-          <a:xfrm>
-            <a:off x="9939528" y="3602736"/>
+          <p:cNvPr id="62" name="Text 54"/>
+          <p:cNvSpPr/>
+          <p:nvPr/>
+        </p:nvSpPr>
+        <p:spPr>
+          <a:xfrm>
+            <a:off x="9939528" y="3712464"/>
             <a:ext cx="1645920" cy="219456"/>
           </a:xfrm>
           <a:prstGeom prst="rect">
@@ -3076,7 +3129,7 @@
       </p:sp>
       <p:sp>
         <p:nvSpPr>
-          <p:cNvPr id="62" name="Shape 54"/>
+          <p:cNvPr id="63" name="Shape 55"/>
           <p:cNvSpPr/>
           <p:nvPr/>
         </p:nvSpPr>
@@ -3099,7 +3152,7 @@
       </p:sp>
       <p:sp>
         <p:nvSpPr>
-          <p:cNvPr id="63" name="Shape 55"/>
+          <p:cNvPr id="64" name="Shape 56"/>
           <p:cNvSpPr/>
           <p:nvPr/>
         </p:nvSpPr>
@@ -3119,7 +3172,7 @@
       </p:sp>
       <p:sp>
         <p:nvSpPr>
-          <p:cNvPr id="64" name="Text 56"/>
+          <p:cNvPr id="65" name="Text 57"/>
           <p:cNvSpPr/>
           <p:nvPr/>
         </p:nvSpPr>
@@ -3181,7 +3234,7 @@
       </p:sp>
       <p:sp>
         <p:nvSpPr>
-          <p:cNvPr id="65" name="Shape 57"/>
+          <p:cNvPr id="66" name="Shape 58"/>
           <p:cNvSpPr/>
           <p:nvPr/>
         </p:nvSpPr>
@@ -3201,7 +3254,7 @@
       </p:sp>
       <p:sp>
         <p:nvSpPr>
-          <p:cNvPr id="66" name="Text 58"/>
+          <p:cNvPr id="67" name="Text 59"/>
           <p:cNvSpPr/>
           <p:nvPr/>
         </p:nvSpPr>
@@ -3263,7 +3316,7 @@
       </p:sp>
       <p:sp>
         <p:nvSpPr>
-          <p:cNvPr id="67" name="Shape 59"/>
+          <p:cNvPr id="68" name="Shape 60"/>
           <p:cNvSpPr/>
           <p:nvPr/>
         </p:nvSpPr>
@@ -3283,7 +3336,7 @@
       </p:sp>
       <p:sp>
         <p:nvSpPr>
-          <p:cNvPr id="68" name="Text 60"/>
+          <p:cNvPr id="69" name="Text 61"/>
           <p:cNvSpPr/>
           <p:nvPr/>
         </p:nvSpPr>
@@ -3345,7 +3398,7 @@
       </p:sp>
       <p:sp>
         <p:nvSpPr>
-          <p:cNvPr id="69" name="Shape 61"/>
+          <p:cNvPr id="70" name="Shape 62"/>
           <p:cNvSpPr/>
           <p:nvPr/>
         </p:nvSpPr>
@@ -3372,7 +3425,7 @@
       </p:sp>
       <p:pic>
         <p:nvPicPr>
-          <p:cNvPr id="70" name="Image 6" descr="preencoded.png">    </p:cNvPr>
+          <p:cNvPr id="71" name="Image 6" descr="preencoded.png">    </p:cNvPr>
           <p:cNvPicPr>
             <a:picLocks noChangeAspect="1"/>
           </p:cNvPicPr>
@@ -3396,7 +3449,7 @@
       </p:pic>
       <p:sp>
         <p:nvSpPr>
-          <p:cNvPr id="71" name="Text 62"/>
+          <p:cNvPr id="72" name="Text 63"/>
           <p:cNvSpPr/>
           <p:nvPr/>
         </p:nvSpPr>
@@ -3458,7 +3511,7 @@
       </p:sp>
       <p:sp>
         <p:nvSpPr>
-          <p:cNvPr id="72" name="Text 63"/>
+          <p:cNvPr id="73" name="Text 64"/>
           <p:cNvSpPr/>
           <p:nvPr/>
         </p:nvSpPr>
@@ -3497,7 +3550,7 @@
       </p:sp>
       <p:sp>
         <p:nvSpPr>
-          <p:cNvPr id="73" name="Text 64"/>
+          <p:cNvPr id="74" name="Text 65"/>
           <p:cNvSpPr/>
           <p:nvPr/>
         </p:nvSpPr>
@@ -3536,7 +3589,7 @@
       </p:sp>
       <p:sp>
         <p:nvSpPr>
-          <p:cNvPr id="74" name="Text 65"/>
+          <p:cNvPr id="75" name="Text 66"/>
           <p:cNvSpPr/>
           <p:nvPr/>
         </p:nvSpPr>
@@ -3575,7 +3628,7 @@
       </p:sp>
       <p:sp>
         <p:nvSpPr>
-          <p:cNvPr id="75" name="Text 66"/>
+          <p:cNvPr id="76" name="Text 67"/>
           <p:cNvSpPr/>
           <p:nvPr/>
         </p:nvSpPr>
@@ -3614,7 +3667,7 @@
       </p:sp>
       <p:sp>
         <p:nvSpPr>
-          <p:cNvPr id="76" name="Text 67"/>
+          <p:cNvPr id="77" name="Text 68"/>
           <p:cNvSpPr/>
           <p:nvPr/>
         </p:nvSpPr>
@@ -3653,7 +3706,7 @@
       </p:sp>
       <p:sp>
         <p:nvSpPr>
-          <p:cNvPr id="77" name="Text 68"/>
+          <p:cNvPr id="78" name="Text 69"/>
           <p:cNvSpPr/>
           <p:nvPr/>
         </p:nvSpPr>
@@ -3692,7 +3745,7 @@
       </p:sp>
       <p:sp>
         <p:nvSpPr>
-          <p:cNvPr id="78" name="Text 69"/>
+          <p:cNvPr id="79" name="Text 70"/>
           <p:cNvSpPr/>
           <p:nvPr/>
         </p:nvSpPr>
@@ -3731,7 +3784,7 @@
       </p:sp>
       <p:sp>
         <p:nvSpPr>
-          <p:cNvPr id="79" name="Text 70"/>
+          <p:cNvPr id="80" name="Text 71"/>
           <p:cNvSpPr/>
           <p:nvPr/>
         </p:nvSpPr>
@@ -3770,7 +3823,7 @@
       </p:sp>
       <p:sp>
         <p:nvSpPr>
-          <p:cNvPr id="80" name="Text 71"/>
+          <p:cNvPr id="81" name="Text 72"/>
           <p:cNvSpPr/>
           <p:nvPr/>
         </p:nvSpPr>
@@ -3809,7 +3862,7 @@
       </p:sp>
       <p:sp>
         <p:nvSpPr>
-          <p:cNvPr id="81" name="Text 72"/>
+          <p:cNvPr id="82" name="Text 73"/>
           <p:cNvSpPr/>
           <p:nvPr/>
         </p:nvSpPr>

--- a/dashboard/public/downloads/dev-transformation-summary-high.pptx
+++ b/dashboard/public/downloads/dev-transformation-summary-high.pptx
@@ -1800,7 +1800,27 @@
                 <a:ea typeface="Malgun Gothic" pitchFamily="34" charset="-122"/>
                 <a:cs typeface="Malgun Gothic" pitchFamily="34" charset="-120"/>
               </a:rPr>
-              <a:t>Micron–Anthropic SCA</a:t>
+              <a:t>Micron–Anthropic</a:t>
+            </a:r>
+            <a:endParaRPr lang="en-US" sz="1250" dirty="0"/>
+          </a:p>
+          <a:p>
+            <a:pPr indent="0" marL="0">
+              <a:lnSpc>
+                <a:spcPct val="105000"/>
+              </a:lnSpc>
+              <a:buNone/>
+            </a:pPr>
+            <a:r>
+              <a:rPr lang="en-US" sz="1250" dirty="0">
+                <a:solidFill>
+                  <a:srgbClr val="17313B"/>
+                </a:solidFill>
+                <a:latin typeface="Malgun Gothic" pitchFamily="34" charset="0"/>
+                <a:ea typeface="Malgun Gothic" pitchFamily="34" charset="-122"/>
+                <a:cs typeface="Malgun Gothic" pitchFamily="34" charset="-120"/>
+              </a:rPr>
+              <a:t>전략적 고객 계약</a:t>
             </a:r>
             <a:endParaRPr lang="en-US" sz="1250" dirty="0"/>
           </a:p>
@@ -1913,7 +1933,7 @@
                 <a:ea typeface="Malgun Gothic" pitchFamily="34" charset="-122"/>
                 <a:cs typeface="Malgun Gothic" pitchFamily="34" charset="-120"/>
               </a:rPr>
-              <a:t>납품 정확성만으론</a:t>
+              <a:t>정확한 납품만으로는</a:t>
             </a:r>
             <a:endParaRPr lang="en-US" sz="1400" dirty="0"/>
           </a:p>
@@ -1933,7 +1953,7 @@
                 <a:ea typeface="Malgun Gothic" pitchFamily="34" charset="-122"/>
                 <a:cs typeface="Malgun Gothic" pitchFamily="34" charset="-120"/>
               </a:rPr>
-              <a:t>SCA 테이블에 못 앉는다</a:t>
+              <a:t>전략적 고객 계약 수주 불가</a:t>
             </a:r>
             <a:endParaRPr lang="en-US" sz="1400" dirty="0"/>
           </a:p>
@@ -2999,7 +3019,7 @@
                 <a:ea typeface="Malgun Gothic" pitchFamily="34" charset="-122"/>
                 <a:cs typeface="Malgun Gothic" pitchFamily="34" charset="-120"/>
               </a:rPr>
-              <a:t>DE 스타·Pod 상주</a:t>
+              <a:t>FDE 스타·Pod 상주</a:t>
             </a:r>
             <a:endParaRPr lang="en-US" sz="1050" dirty="0"/>
           </a:p>
@@ -3483,7 +3503,7 @@
                 <a:ea typeface="Malgun Gothic" pitchFamily="34" charset="-122"/>
                 <a:cs typeface="Malgun Gothic" pitchFamily="34" charset="-120"/>
               </a:rPr>
-              <a:t>DE를 스타 플레이어로</a:t>
+              <a:t>FDE를 스타 플레이어로</a:t>
             </a:r>
             <a:endParaRPr lang="en-US" sz="1300" dirty="0"/>
           </a:p>

--- a/dashboard/public/downloads/dev-transformation-summary-high.pptx
+++ b/dashboard/public/downloads/dev-transformation-summary-high.pptx
@@ -3155,281 +3155,12 @@
         </p:nvSpPr>
         <p:spPr>
           <a:xfrm>
-            <a:off x="8695944" y="4206240"/>
-            <a:ext cx="2468880" cy="0"/>
-          </a:xfrm>
-          <a:prstGeom prst="line">
-            <a:avLst/>
-          </a:prstGeom>
-          <a:noFill/>
-          <a:ln w="19050">
-            <a:solidFill>
-              <a:srgbClr val="C4CFD6"/>
-            </a:solidFill>
-            <a:prstDash val="solid"/>
-          </a:ln>
-        </p:spPr>
-      </p:sp>
-      <p:sp>
-        <p:nvSpPr>
-          <p:cNvPr id="64" name="Shape 56"/>
-          <p:cNvSpPr/>
-          <p:nvPr/>
-        </p:nvSpPr>
-        <p:spPr>
-          <a:xfrm>
-            <a:off x="8631936" y="4142232"/>
-            <a:ext cx="128016" cy="128016"/>
-          </a:xfrm>
-          <a:prstGeom prst="ellipse">
-            <a:avLst/>
-          </a:prstGeom>
-          <a:solidFill>
-            <a:srgbClr val="17313B"/>
-          </a:solidFill>
-          <a:ln/>
-        </p:spPr>
-      </p:sp>
-      <p:sp>
-        <p:nvSpPr>
-          <p:cNvPr id="65" name="Text 57"/>
-          <p:cNvSpPr/>
-          <p:nvPr/>
-        </p:nvSpPr>
-        <p:spPr>
-          <a:xfrm>
-            <a:off x="8147304" y="4334256"/>
-            <a:ext cx="1097280" cy="457200"/>
-          </a:xfrm>
-          <a:prstGeom prst="rect">
-            <a:avLst/>
-          </a:prstGeom>
-          <a:noFill/>
-          <a:ln/>
-        </p:spPr>
-        <p:txBody>
-          <a:bodyPr wrap="square" lIns="0" tIns="0" rIns="0" bIns="0" rtlCol="0" anchor="ctr"/>
-          <a:lstStyle/>
-          <a:p>
-            <a:pPr algn="ctr" indent="0" marL="0">
-              <a:lnSpc>
-                <a:spcPct val="100000"/>
-              </a:lnSpc>
-              <a:buNone/>
-            </a:pPr>
-            <a:r>
-              <a:rPr lang="en-US" sz="1150" b="1" dirty="0">
-                <a:solidFill>
-                  <a:srgbClr val="17313B"/>
-                </a:solidFill>
-                <a:latin typeface="Malgun Gothic" pitchFamily="34" charset="0"/>
-                <a:ea typeface="Malgun Gothic" pitchFamily="34" charset="-122"/>
-                <a:cs typeface="Malgun Gothic" pitchFamily="34" charset="-120"/>
-              </a:rPr>
-              <a:t>90일</a:t>
-            </a:r>
-            <a:endParaRPr lang="en-US" sz="1150" dirty="0"/>
-          </a:p>
-          <a:p>
-            <a:pPr algn="ctr" indent="0" marL="0">
-              <a:lnSpc>
-                <a:spcPct val="100000"/>
-              </a:lnSpc>
-              <a:buNone/>
-            </a:pPr>
-            <a:r>
-              <a:rPr lang="en-US" sz="1150" b="1" dirty="0">
-                <a:solidFill>
-                  <a:srgbClr val="17313B"/>
-                </a:solidFill>
-                <a:latin typeface="Malgun Gothic" pitchFamily="34" charset="0"/>
-                <a:ea typeface="Malgun Gothic" pitchFamily="34" charset="-122"/>
-                <a:cs typeface="Malgun Gothic" pitchFamily="34" charset="-120"/>
-              </a:rPr>
-              <a:t>증명</a:t>
-            </a:r>
-            <a:endParaRPr lang="en-US" sz="1150" dirty="0"/>
-          </a:p>
-        </p:txBody>
-      </p:sp>
-      <p:sp>
-        <p:nvSpPr>
-          <p:cNvPr id="66" name="Shape 58"/>
-          <p:cNvSpPr/>
-          <p:nvPr/>
-        </p:nvSpPr>
-        <p:spPr>
-          <a:xfrm>
-            <a:off x="9866376" y="4142232"/>
-            <a:ext cx="128016" cy="128016"/>
-          </a:xfrm>
-          <a:prstGeom prst="ellipse">
-            <a:avLst/>
-          </a:prstGeom>
-          <a:solidFill>
-            <a:srgbClr val="17313B"/>
-          </a:solidFill>
-          <a:ln/>
-        </p:spPr>
-      </p:sp>
-      <p:sp>
-        <p:nvSpPr>
-          <p:cNvPr id="67" name="Text 59"/>
-          <p:cNvSpPr/>
-          <p:nvPr/>
-        </p:nvSpPr>
-        <p:spPr>
-          <a:xfrm>
-            <a:off x="9381744" y="4334256"/>
-            <a:ext cx="1097280" cy="457200"/>
-          </a:xfrm>
-          <a:prstGeom prst="rect">
-            <a:avLst/>
-          </a:prstGeom>
-          <a:noFill/>
-          <a:ln/>
-        </p:spPr>
-        <p:txBody>
-          <a:bodyPr wrap="square" lIns="0" tIns="0" rIns="0" bIns="0" rtlCol="0" anchor="ctr"/>
-          <a:lstStyle/>
-          <a:p>
-            <a:pPr algn="ctr" indent="0" marL="0">
-              <a:lnSpc>
-                <a:spcPct val="100000"/>
-              </a:lnSpc>
-              <a:buNone/>
-            </a:pPr>
-            <a:r>
-              <a:rPr lang="en-US" sz="1150" b="1" dirty="0">
-                <a:solidFill>
-                  <a:srgbClr val="17313B"/>
-                </a:solidFill>
-                <a:latin typeface="Malgun Gothic" pitchFamily="34" charset="0"/>
-                <a:ea typeface="Malgun Gothic" pitchFamily="34" charset="-122"/>
-                <a:cs typeface="Malgun Gothic" pitchFamily="34" charset="-120"/>
-              </a:rPr>
-              <a:t>1년</a:t>
-            </a:r>
-            <a:endParaRPr lang="en-US" sz="1150" dirty="0"/>
-          </a:p>
-          <a:p>
-            <a:pPr algn="ctr" indent="0" marL="0">
-              <a:lnSpc>
-                <a:spcPct val="100000"/>
-              </a:lnSpc>
-              <a:buNone/>
-            </a:pPr>
-            <a:r>
-              <a:rPr lang="en-US" sz="1150" b="1" dirty="0">
-                <a:solidFill>
-                  <a:srgbClr val="17313B"/>
-                </a:solidFill>
-                <a:latin typeface="Malgun Gothic" pitchFamily="34" charset="0"/>
-                <a:ea typeface="Malgun Gothic" pitchFamily="34" charset="-122"/>
-                <a:cs typeface="Malgun Gothic" pitchFamily="34" charset="-120"/>
-              </a:rPr>
-              <a:t>제도화</a:t>
-            </a:r>
-            <a:endParaRPr lang="en-US" sz="1150" dirty="0"/>
-          </a:p>
-        </p:txBody>
-      </p:sp>
-      <p:sp>
-        <p:nvSpPr>
-          <p:cNvPr id="68" name="Shape 60"/>
-          <p:cNvSpPr/>
-          <p:nvPr/>
-        </p:nvSpPr>
-        <p:spPr>
-          <a:xfrm>
-            <a:off x="11100816" y="4142232"/>
-            <a:ext cx="128016" cy="128016"/>
-          </a:xfrm>
-          <a:prstGeom prst="ellipse">
-            <a:avLst/>
-          </a:prstGeom>
-          <a:solidFill>
-            <a:srgbClr val="17313B"/>
-          </a:solidFill>
-          <a:ln/>
-        </p:spPr>
-      </p:sp>
-      <p:sp>
-        <p:nvSpPr>
-          <p:cNvPr id="69" name="Text 61"/>
-          <p:cNvSpPr/>
-          <p:nvPr/>
-        </p:nvSpPr>
-        <p:spPr>
-          <a:xfrm>
-            <a:off x="10616184" y="4334256"/>
-            <a:ext cx="1097280" cy="457200"/>
-          </a:xfrm>
-          <a:prstGeom prst="rect">
-            <a:avLst/>
-          </a:prstGeom>
-          <a:noFill/>
-          <a:ln/>
-        </p:spPr>
-        <p:txBody>
-          <a:bodyPr wrap="square" lIns="0" tIns="0" rIns="0" bIns="0" rtlCol="0" anchor="ctr"/>
-          <a:lstStyle/>
-          <a:p>
-            <a:pPr algn="ctr" indent="0" marL="0">
-              <a:lnSpc>
-                <a:spcPct val="100000"/>
-              </a:lnSpc>
-              <a:buNone/>
-            </a:pPr>
-            <a:r>
-              <a:rPr lang="en-US" sz="1150" b="1" dirty="0">
-                <a:solidFill>
-                  <a:srgbClr val="17313B"/>
-                </a:solidFill>
-                <a:latin typeface="Malgun Gothic" pitchFamily="34" charset="0"/>
-                <a:ea typeface="Malgun Gothic" pitchFamily="34" charset="-122"/>
-                <a:cs typeface="Malgun Gothic" pitchFamily="34" charset="-120"/>
-              </a:rPr>
-              <a:t>3년</a:t>
-            </a:r>
-            <a:endParaRPr lang="en-US" sz="1150" dirty="0"/>
-          </a:p>
-          <a:p>
-            <a:pPr algn="ctr" indent="0" marL="0">
-              <a:lnSpc>
-                <a:spcPct val="100000"/>
-              </a:lnSpc>
-              <a:buNone/>
-            </a:pPr>
-            <a:r>
-              <a:rPr lang="en-US" sz="1150" b="1" dirty="0">
-                <a:solidFill>
-                  <a:srgbClr val="17313B"/>
-                </a:solidFill>
-                <a:latin typeface="Malgun Gothic" pitchFamily="34" charset="0"/>
-                <a:ea typeface="Malgun Gothic" pitchFamily="34" charset="-122"/>
-                <a:cs typeface="Malgun Gothic" pitchFamily="34" charset="-120"/>
-              </a:rPr>
-              <a:t>표준화</a:t>
-            </a:r>
-            <a:endParaRPr lang="en-US" sz="1150" dirty="0"/>
-          </a:p>
-        </p:txBody>
-      </p:sp>
-      <p:sp>
-        <p:nvSpPr>
-          <p:cNvPr id="70" name="Shape 62"/>
-          <p:cNvSpPr/>
-          <p:nvPr/>
-        </p:nvSpPr>
-        <p:spPr>
-          <a:xfrm>
-            <a:off x="8311896" y="4864608"/>
-            <a:ext cx="3236976" cy="512064"/>
+            <a:off x="8311896" y="4480560"/>
+            <a:ext cx="3236976" cy="640080"/>
           </a:xfrm>
           <a:prstGeom prst="roundRect">
             <a:avLst>
-              <a:gd name="adj" fmla="val 14286"/>
+              <a:gd name="adj" fmla="val 11429"/>
             </a:avLst>
           </a:prstGeom>
           <a:solidFill>
@@ -3445,7 +3176,7 @@
       </p:sp>
       <p:pic>
         <p:nvPicPr>
-          <p:cNvPr id="71" name="Image 6" descr="preencoded.png">    </p:cNvPr>
+          <p:cNvPr id="64" name="Image 6" descr="preencoded.png">    </p:cNvPr>
           <p:cNvPicPr>
             <a:picLocks noChangeAspect="1"/>
           </p:cNvPicPr>
@@ -3459,7 +3190,7 @@
         </p:blipFill>
         <p:spPr>
           <a:xfrm>
-            <a:off x="8494776" y="4937760"/>
+            <a:off x="8494776" y="4617720"/>
             <a:ext cx="365760" cy="365760"/>
           </a:xfrm>
           <a:prstGeom prst="rect">
@@ -3469,14 +3200,14 @@
       </p:pic>
       <p:sp>
         <p:nvSpPr>
-          <p:cNvPr id="72" name="Text 63"/>
-          <p:cNvSpPr/>
-          <p:nvPr/>
-        </p:nvSpPr>
-        <p:spPr>
-          <a:xfrm>
-            <a:off x="8988552" y="4864608"/>
-            <a:ext cx="2377440" cy="512064"/>
+          <p:cNvPr id="65" name="Text 56"/>
+          <p:cNvSpPr/>
+          <p:nvPr/>
+        </p:nvSpPr>
+        <p:spPr>
+          <a:xfrm>
+            <a:off x="8988552" y="4480560"/>
+            <a:ext cx="2377440" cy="640080"/>
           </a:xfrm>
           <a:prstGeom prst="rect">
             <a:avLst/>
@@ -3495,7 +3226,7 @@
               <a:buNone/>
             </a:pPr>
             <a:r>
-              <a:rPr lang="en-US" sz="1300" b="1" dirty="0">
+              <a:rPr lang="en-US" sz="1350" b="1" dirty="0">
                 <a:solidFill>
                   <a:srgbClr val="17313B"/>
                 </a:solidFill>
@@ -3505,7 +3236,7 @@
               </a:rPr>
               <a:t>FDE를 스타 플레이어로</a:t>
             </a:r>
-            <a:endParaRPr lang="en-US" sz="1300" dirty="0"/>
+            <a:endParaRPr lang="en-US" sz="1350" dirty="0"/>
           </a:p>
           <a:p>
             <a:pPr indent="0" marL="0">
@@ -3515,6 +3246,106 @@
               <a:buNone/>
             </a:pPr>
             <a:r>
+              <a:rPr lang="en-US" sz="1100" dirty="0">
+                <a:solidFill>
+                  <a:srgbClr val="5A7184"/>
+                </a:solidFill>
+                <a:latin typeface="Malgun Gothic" pitchFamily="34" charset="0"/>
+                <a:ea typeface="Malgun Gothic" pitchFamily="34" charset="-122"/>
+                <a:cs typeface="Malgun Gothic" pitchFamily="34" charset="-120"/>
+              </a:rPr>
+              <a:t>고객과 기술 생태계 공동 설계</a:t>
+            </a:r>
+            <a:endParaRPr lang="en-US" sz="1350" dirty="0"/>
+          </a:p>
+        </p:txBody>
+      </p:sp>
+      <p:sp>
+        <p:nvSpPr>
+          <p:cNvPr id="66" name="Shape 57"/>
+          <p:cNvSpPr/>
+          <p:nvPr/>
+        </p:nvSpPr>
+        <p:spPr>
+          <a:xfrm>
+            <a:off x="457200" y="5559552"/>
+            <a:ext cx="11274552" cy="822960"/>
+          </a:xfrm>
+          <a:prstGeom prst="roundRect">
+            <a:avLst>
+              <a:gd name="adj" fmla="val 10000"/>
+            </a:avLst>
+          </a:prstGeom>
+          <a:solidFill>
+            <a:srgbClr val="F5F7F8"/>
+          </a:solidFill>
+          <a:ln/>
+        </p:spPr>
+      </p:sp>
+      <p:sp>
+        <p:nvSpPr>
+          <p:cNvPr id="67" name="Text 58"/>
+          <p:cNvSpPr/>
+          <p:nvPr/>
+        </p:nvSpPr>
+        <p:spPr>
+          <a:xfrm>
+            <a:off x="676656" y="5705856"/>
+            <a:ext cx="1920240" cy="274320"/>
+          </a:xfrm>
+          <a:prstGeom prst="rect">
+            <a:avLst/>
+          </a:prstGeom>
+          <a:noFill/>
+          <a:ln/>
+        </p:spPr>
+        <p:txBody>
+          <a:bodyPr wrap="square" lIns="0" tIns="0" rIns="0" bIns="0" rtlCol="0" anchor="ctr"/>
+          <a:lstStyle/>
+          <a:p>
+            <a:pPr indent="0" marL="0">
+              <a:buNone/>
+            </a:pPr>
+            <a:r>
+              <a:rPr lang="en-US" sz="1500" b="1" dirty="0">
+                <a:solidFill>
+                  <a:srgbClr val="17313B"/>
+                </a:solidFill>
+                <a:latin typeface="Malgun Gothic" pitchFamily="34" charset="0"/>
+                <a:ea typeface="Malgun Gothic" pitchFamily="34" charset="-122"/>
+                <a:cs typeface="Malgun Gothic" pitchFamily="34" charset="-120"/>
+              </a:rPr>
+              <a:t>환경 변화</a:t>
+            </a:r>
+            <a:endParaRPr lang="en-US" sz="1500" dirty="0"/>
+          </a:p>
+        </p:txBody>
+      </p:sp>
+      <p:sp>
+        <p:nvSpPr>
+          <p:cNvPr id="68" name="Text 59"/>
+          <p:cNvSpPr/>
+          <p:nvPr/>
+        </p:nvSpPr>
+        <p:spPr>
+          <a:xfrm>
+            <a:off x="676656" y="5998464"/>
+            <a:ext cx="2011680" cy="219456"/>
+          </a:xfrm>
+          <a:prstGeom prst="rect">
+            <a:avLst/>
+          </a:prstGeom>
+          <a:noFill/>
+          <a:ln/>
+        </p:spPr>
+        <p:txBody>
+          <a:bodyPr wrap="square" lIns="0" tIns="0" rIns="0" bIns="0" rtlCol="0" anchor="ctr"/>
+          <a:lstStyle/>
+          <a:p>
+            <a:pPr indent="0" marL="0">
+              <a:buNone/>
+            </a:pPr>
+            <a:r>
               <a:rPr lang="en-US" sz="1050" dirty="0">
                 <a:solidFill>
                   <a:srgbClr val="5A7184"/>
@@ -3523,9 +3354,227 @@
                 <a:ea typeface="Malgun Gothic" pitchFamily="34" charset="-122"/>
                 <a:cs typeface="Malgun Gothic" pitchFamily="34" charset="-120"/>
               </a:rPr>
-              <a:t>고객과 기술 생태계 공동 설계</a:t>
-            </a:r>
-            <a:endParaRPr lang="en-US" sz="1300" dirty="0"/>
+              <a:t>영입 가능한 임금 수준</a:t>
+            </a:r>
+            <a:endParaRPr lang="en-US" sz="1050" dirty="0"/>
+          </a:p>
+        </p:txBody>
+      </p:sp>
+      <p:sp>
+        <p:nvSpPr>
+          <p:cNvPr id="69" name="Text 60"/>
+          <p:cNvSpPr/>
+          <p:nvPr/>
+        </p:nvSpPr>
+        <p:spPr>
+          <a:xfrm>
+            <a:off x="2743200" y="5669280"/>
+            <a:ext cx="2331720" cy="603504"/>
+          </a:xfrm>
+          <a:prstGeom prst="roundRect">
+            <a:avLst>
+              <a:gd name="adj" fmla="val 9091"/>
+            </a:avLst>
+          </a:prstGeom>
+          <a:solidFill>
+            <a:srgbClr val="E7ECEF"/>
+          </a:solidFill>
+          <a:ln w="12700">
+            <a:solidFill>
+              <a:srgbClr val="DCE4E9"/>
+            </a:solidFill>
+          </a:ln>
+        </p:spPr>
+        <p:txBody>
+          <a:bodyPr wrap="square" lIns="0" tIns="0" rIns="0" bIns="0" rtlCol="0" anchor="ctr"/>
+          <a:lstStyle/>
+          <a:p>
+            <a:pPr algn="ctr" indent="0" marL="0">
+              <a:lnSpc>
+                <a:spcPct val="105000"/>
+              </a:lnSpc>
+              <a:buNone/>
+            </a:pPr>
+            <a:r>
+              <a:rPr lang="en-US" sz="1250" b="1" dirty="0">
+                <a:solidFill>
+                  <a:srgbClr val="5A7184"/>
+                </a:solidFill>
+                <a:latin typeface="Malgun Gothic" pitchFamily="34" charset="0"/>
+                <a:ea typeface="Malgun Gothic" pitchFamily="34" charset="-122"/>
+                <a:cs typeface="Malgun Gothic" pitchFamily="34" charset="-120"/>
+              </a:rPr>
+              <a:t>과거</a:t>
+            </a:r>
+            <a:endParaRPr lang="en-US" sz="1250" dirty="0"/>
+          </a:p>
+          <a:p>
+            <a:pPr algn="ctr" indent="0" marL="0">
+              <a:lnSpc>
+                <a:spcPct val="105000"/>
+              </a:lnSpc>
+              <a:buNone/>
+            </a:pPr>
+            <a:r>
+              <a:rPr lang="en-US" sz="1000" dirty="0">
+                <a:solidFill>
+                  <a:srgbClr val="5A7184"/>
+                </a:solidFill>
+                <a:latin typeface="Malgun Gothic" pitchFamily="34" charset="0"/>
+                <a:ea typeface="Malgun Gothic" pitchFamily="34" charset="-122"/>
+                <a:cs typeface="Malgun Gothic" pitchFamily="34" charset="-120"/>
+              </a:rPr>
+              <a:t>실리콘밸리 보상 열위</a:t>
+            </a:r>
+            <a:endParaRPr lang="en-US" sz="1250" dirty="0"/>
+          </a:p>
+        </p:txBody>
+      </p:sp>
+      <p:sp>
+        <p:nvSpPr>
+          <p:cNvPr id="70" name="Text 61"/>
+          <p:cNvSpPr/>
+          <p:nvPr/>
+        </p:nvSpPr>
+        <p:spPr>
+          <a:xfrm>
+            <a:off x="5074920" y="5669280"/>
+            <a:ext cx="219456" cy="603504"/>
+          </a:xfrm>
+          <a:prstGeom prst="rect">
+            <a:avLst/>
+          </a:prstGeom>
+          <a:noFill/>
+          <a:ln/>
+        </p:spPr>
+        <p:txBody>
+          <a:bodyPr wrap="square" lIns="0" tIns="0" rIns="0" bIns="0" rtlCol="0" anchor="ctr"/>
+          <a:lstStyle/>
+          <a:p>
+            <a:pPr algn="ctr" indent="0" marL="0">
+              <a:buNone/>
+            </a:pPr>
+            <a:r>
+              <a:rPr lang="en-US" sz="1200" dirty="0">
+                <a:solidFill>
+                  <a:srgbClr val="5A7184"/>
+                </a:solidFill>
+                <a:latin typeface="Malgun Gothic" pitchFamily="34" charset="0"/>
+                <a:ea typeface="Malgun Gothic" pitchFamily="34" charset="-122"/>
+                <a:cs typeface="Malgun Gothic" pitchFamily="34" charset="-120"/>
+              </a:rPr>
+              <a:t>▶</a:t>
+            </a:r>
+            <a:endParaRPr lang="en-US" sz="1200" dirty="0"/>
+          </a:p>
+        </p:txBody>
+      </p:sp>
+      <p:sp>
+        <p:nvSpPr>
+          <p:cNvPr id="71" name="Text 62"/>
+          <p:cNvSpPr/>
+          <p:nvPr/>
+        </p:nvSpPr>
+        <p:spPr>
+          <a:xfrm>
+            <a:off x="5294376" y="5669280"/>
+            <a:ext cx="3291840" cy="603504"/>
+          </a:xfrm>
+          <a:prstGeom prst="roundRect">
+            <a:avLst>
+              <a:gd name="adj" fmla="val 9091"/>
+            </a:avLst>
+          </a:prstGeom>
+          <a:solidFill>
+            <a:srgbClr val="FFFFFF"/>
+          </a:solidFill>
+          <a:ln w="12700">
+            <a:solidFill>
+              <a:srgbClr val="DCE4E9"/>
+            </a:solidFill>
+          </a:ln>
+        </p:spPr>
+        <p:txBody>
+          <a:bodyPr wrap="square" lIns="0" tIns="0" rIns="0" bIns="0" rtlCol="0" anchor="ctr"/>
+          <a:lstStyle/>
+          <a:p>
+            <a:pPr algn="ctr" indent="0" marL="0">
+              <a:lnSpc>
+                <a:spcPct val="105000"/>
+              </a:lnSpc>
+              <a:buNone/>
+            </a:pPr>
+            <a:r>
+              <a:rPr lang="en-US" sz="1250" b="1" dirty="0">
+                <a:solidFill>
+                  <a:srgbClr val="17313B"/>
+                </a:solidFill>
+                <a:latin typeface="Malgun Gothic" pitchFamily="34" charset="0"/>
+                <a:ea typeface="Malgun Gothic" pitchFamily="34" charset="-122"/>
+                <a:cs typeface="Malgun Gothic" pitchFamily="34" charset="-120"/>
+              </a:rPr>
+              <a:t>현재 — 처우 급등</a:t>
+            </a:r>
+            <a:endParaRPr lang="en-US" sz="1250" dirty="0"/>
+          </a:p>
+          <a:p>
+            <a:pPr algn="ctr" indent="0" marL="0">
+              <a:lnSpc>
+                <a:spcPct val="105000"/>
+              </a:lnSpc>
+              <a:buNone/>
+            </a:pPr>
+            <a:r>
+              <a:rPr lang="en-US" sz="1000" dirty="0">
+                <a:solidFill>
+                  <a:srgbClr val="5A7184"/>
+                </a:solidFill>
+                <a:latin typeface="Malgun Gothic" pitchFamily="34" charset="0"/>
+                <a:ea typeface="Malgun Gothic" pitchFamily="34" charset="-122"/>
+                <a:cs typeface="Malgun Gothic" pitchFamily="34" charset="-120"/>
+              </a:rPr>
+              <a:t>성과급 ~6억 · 상한 철폐 · 최대 12.9억 전망</a:t>
+            </a:r>
+            <a:endParaRPr lang="en-US" sz="1250" dirty="0"/>
+          </a:p>
+        </p:txBody>
+      </p:sp>
+      <p:sp>
+        <p:nvSpPr>
+          <p:cNvPr id="72" name="Text 63"/>
+          <p:cNvSpPr/>
+          <p:nvPr/>
+        </p:nvSpPr>
+        <p:spPr>
+          <a:xfrm>
+            <a:off x="8586216" y="5669280"/>
+            <a:ext cx="219456" cy="603504"/>
+          </a:xfrm>
+          <a:prstGeom prst="rect">
+            <a:avLst/>
+          </a:prstGeom>
+          <a:noFill/>
+          <a:ln/>
+        </p:spPr>
+        <p:txBody>
+          <a:bodyPr wrap="square" lIns="0" tIns="0" rIns="0" bIns="0" rtlCol="0" anchor="ctr"/>
+          <a:lstStyle/>
+          <a:p>
+            <a:pPr algn="ctr" indent="0" marL="0">
+              <a:buNone/>
+            </a:pPr>
+            <a:r>
+              <a:rPr lang="en-US" sz="1200" dirty="0">
+                <a:solidFill>
+                  <a:srgbClr val="5A7184"/>
+                </a:solidFill>
+                <a:latin typeface="Malgun Gothic" pitchFamily="34" charset="0"/>
+                <a:ea typeface="Malgun Gothic" pitchFamily="34" charset="-122"/>
+                <a:cs typeface="Malgun Gothic" pitchFamily="34" charset="-120"/>
+              </a:rPr>
+              <a:t>▶</a:t>
+            </a:r>
+            <a:endParaRPr lang="en-US" sz="1200" dirty="0"/>
           </a:p>
         </p:txBody>
       </p:sp>
@@ -3537,24 +3586,35 @@
         </p:nvSpPr>
         <p:spPr>
           <a:xfrm>
-            <a:off x="457200" y="5687568"/>
-            <a:ext cx="2167128" cy="384048"/>
-          </a:xfrm>
-          <a:prstGeom prst="rect">
-            <a:avLst/>
-          </a:prstGeom>
-          <a:noFill/>
-          <a:ln/>
+            <a:off x="8805672" y="5669280"/>
+            <a:ext cx="2697480" cy="603504"/>
+          </a:xfrm>
+          <a:prstGeom prst="roundRect">
+            <a:avLst>
+              <a:gd name="adj" fmla="val 9091"/>
+            </a:avLst>
+          </a:prstGeom>
+          <a:solidFill>
+            <a:srgbClr val="E8F6F0"/>
+          </a:solidFill>
+          <a:ln w="15875">
+            <a:solidFill>
+              <a:srgbClr val="02A878"/>
+            </a:solidFill>
+          </a:ln>
         </p:spPr>
         <p:txBody>
           <a:bodyPr wrap="square" lIns="0" tIns="0" rIns="0" bIns="0" rtlCol="0" anchor="ctr"/>
           <a:lstStyle/>
           <a:p>
             <a:pPr algn="ctr" indent="0" marL="0">
-              <a:buNone/>
-            </a:pPr>
-            <a:r>
-              <a:rPr lang="en-US" sz="2400" b="1" dirty="0">
+              <a:lnSpc>
+                <a:spcPct val="105000"/>
+              </a:lnSpc>
+              <a:buNone/>
+            </a:pPr>
+            <a:r>
+              <a:rPr lang="en-US" sz="1250" b="1" dirty="0">
                 <a:solidFill>
                   <a:srgbClr val="17313B"/>
                 </a:solidFill>
@@ -3562,38 +3622,19 @@
                 <a:ea typeface="Malgun Gothic" pitchFamily="34" charset="-122"/>
                 <a:cs typeface="Malgun Gothic" pitchFamily="34" charset="-120"/>
               </a:rPr>
-              <a:t>40건/년</a:t>
-            </a:r>
-            <a:endParaRPr lang="en-US" sz="2400" dirty="0"/>
-          </a:p>
-        </p:txBody>
-      </p:sp>
-      <p:sp>
-        <p:nvSpPr>
-          <p:cNvPr id="74" name="Text 65"/>
-          <p:cNvSpPr/>
-          <p:nvPr/>
-        </p:nvSpPr>
-        <p:spPr>
-          <a:xfrm>
-            <a:off x="457200" y="6089904"/>
-            <a:ext cx="2167128" cy="237744"/>
-          </a:xfrm>
-          <a:prstGeom prst="rect">
-            <a:avLst/>
-          </a:prstGeom>
-          <a:noFill/>
-          <a:ln/>
-        </p:spPr>
-        <p:txBody>
-          <a:bodyPr wrap="square" lIns="0" tIns="0" rIns="0" bIns="0" rtlCol="0" anchor="ctr"/>
-          <a:lstStyle/>
+              <a:t>선순환 기대</a:t>
+            </a:r>
+            <a:endParaRPr lang="en-US" sz="1250" dirty="0"/>
+          </a:p>
           <a:p>
             <a:pPr algn="ctr" indent="0" marL="0">
-              <a:buNone/>
-            </a:pPr>
-            <a:r>
-              <a:rPr lang="en-US" sz="1200" dirty="0">
+              <a:lnSpc>
+                <a:spcPct val="105000"/>
+              </a:lnSpc>
+              <a:buNone/>
+            </a:pPr>
+            <a:r>
+              <a:rPr lang="en-US" sz="1000" dirty="0">
                 <a:solidFill>
                   <a:srgbClr val="5A7184"/>
                 </a:solidFill>
@@ -3601,321 +3642,9 @@
                 <a:ea typeface="Malgun Gothic" pitchFamily="34" charset="-122"/>
                 <a:cs typeface="Malgun Gothic" pitchFamily="34" charset="-120"/>
               </a:rPr>
-              <a:t>선제 제안 (현재 ~0)</a:t>
-            </a:r>
-            <a:endParaRPr lang="en-US" sz="1200" dirty="0"/>
-          </a:p>
-        </p:txBody>
-      </p:sp>
-      <p:sp>
-        <p:nvSpPr>
-          <p:cNvPr id="75" name="Text 66"/>
-          <p:cNvSpPr/>
-          <p:nvPr/>
-        </p:nvSpPr>
-        <p:spPr>
-          <a:xfrm>
-            <a:off x="2715768" y="5687568"/>
-            <a:ext cx="2167128" cy="384048"/>
-          </a:xfrm>
-          <a:prstGeom prst="rect">
-            <a:avLst/>
-          </a:prstGeom>
-          <a:noFill/>
-          <a:ln/>
-        </p:spPr>
-        <p:txBody>
-          <a:bodyPr wrap="square" lIns="0" tIns="0" rIns="0" bIns="0" rtlCol="0" anchor="ctr"/>
-          <a:lstStyle/>
-          <a:p>
-            <a:pPr algn="ctr" indent="0" marL="0">
-              <a:buNone/>
-            </a:pPr>
-            <a:r>
-              <a:rPr lang="en-US" sz="2400" b="1" dirty="0">
-                <a:solidFill>
-                  <a:srgbClr val="17313B"/>
-                </a:solidFill>
-                <a:latin typeface="Malgun Gothic" pitchFamily="34" charset="0"/>
-                <a:ea typeface="Malgun Gothic" pitchFamily="34" charset="-122"/>
-                <a:cs typeface="Malgun Gothic" pitchFamily="34" charset="-120"/>
-              </a:rPr>
-              <a:t>35%</a:t>
-            </a:r>
-            <a:endParaRPr lang="en-US" sz="2400" dirty="0"/>
-          </a:p>
-        </p:txBody>
-      </p:sp>
-      <p:sp>
-        <p:nvSpPr>
-          <p:cNvPr id="76" name="Text 67"/>
-          <p:cNvSpPr/>
-          <p:nvPr/>
-        </p:nvSpPr>
-        <p:spPr>
-          <a:xfrm>
-            <a:off x="2715768" y="6089904"/>
-            <a:ext cx="2167128" cy="237744"/>
-          </a:xfrm>
-          <a:prstGeom prst="rect">
-            <a:avLst/>
-          </a:prstGeom>
-          <a:noFill/>
-          <a:ln/>
-        </p:spPr>
-        <p:txBody>
-          <a:bodyPr wrap="square" lIns="0" tIns="0" rIns="0" bIns="0" rtlCol="0" anchor="ctr"/>
-          <a:lstStyle/>
-          <a:p>
-            <a:pPr algn="ctr" indent="0" marL="0">
-              <a:buNone/>
-            </a:pPr>
-            <a:r>
-              <a:rPr lang="en-US" sz="1200" dirty="0">
-                <a:solidFill>
-                  <a:srgbClr val="5A7184"/>
-                </a:solidFill>
-                <a:latin typeface="Malgun Gothic" pitchFamily="34" charset="0"/>
-                <a:ea typeface="Malgun Gothic" pitchFamily="34" charset="-122"/>
-                <a:cs typeface="Malgun Gothic" pitchFamily="34" charset="-120"/>
-              </a:rPr>
-              <a:t>로드맵 채택률</a:t>
-            </a:r>
-            <a:endParaRPr lang="en-US" sz="1200" dirty="0"/>
-          </a:p>
-        </p:txBody>
-      </p:sp>
-      <p:sp>
-        <p:nvSpPr>
-          <p:cNvPr id="77" name="Text 68"/>
-          <p:cNvSpPr/>
-          <p:nvPr/>
-        </p:nvSpPr>
-        <p:spPr>
-          <a:xfrm>
-            <a:off x="4974336" y="5687568"/>
-            <a:ext cx="2167128" cy="384048"/>
-          </a:xfrm>
-          <a:prstGeom prst="rect">
-            <a:avLst/>
-          </a:prstGeom>
-          <a:noFill/>
-          <a:ln/>
-        </p:spPr>
-        <p:txBody>
-          <a:bodyPr wrap="square" lIns="0" tIns="0" rIns="0" bIns="0" rtlCol="0" anchor="ctr"/>
-          <a:lstStyle/>
-          <a:p>
-            <a:pPr algn="ctr" indent="0" marL="0">
-              <a:buNone/>
-            </a:pPr>
-            <a:r>
-              <a:rPr lang="en-US" sz="2400" b="1" dirty="0">
-                <a:solidFill>
-                  <a:srgbClr val="17313B"/>
-                </a:solidFill>
-                <a:latin typeface="Malgun Gothic" pitchFamily="34" charset="0"/>
-                <a:ea typeface="Malgun Gothic" pitchFamily="34" charset="-122"/>
-                <a:cs typeface="Malgun Gothic" pitchFamily="34" charset="-120"/>
-              </a:rPr>
-              <a:t>30%+</a:t>
-            </a:r>
-            <a:endParaRPr lang="en-US" sz="2400" dirty="0"/>
-          </a:p>
-        </p:txBody>
-      </p:sp>
-      <p:sp>
-        <p:nvSpPr>
-          <p:cNvPr id="78" name="Text 69"/>
-          <p:cNvSpPr/>
-          <p:nvPr/>
-        </p:nvSpPr>
-        <p:spPr>
-          <a:xfrm>
-            <a:off x="4974336" y="6089904"/>
-            <a:ext cx="2167128" cy="237744"/>
-          </a:xfrm>
-          <a:prstGeom prst="rect">
-            <a:avLst/>
-          </a:prstGeom>
-          <a:noFill/>
-          <a:ln/>
-        </p:spPr>
-        <p:txBody>
-          <a:bodyPr wrap="square" lIns="0" tIns="0" rIns="0" bIns="0" rtlCol="0" anchor="ctr"/>
-          <a:lstStyle/>
-          <a:p>
-            <a:pPr algn="ctr" indent="0" marL="0">
-              <a:buNone/>
-            </a:pPr>
-            <a:r>
-              <a:rPr lang="en-US" sz="1200" dirty="0">
-                <a:solidFill>
-                  <a:srgbClr val="5A7184"/>
-                </a:solidFill>
-                <a:latin typeface="Malgun Gothic" pitchFamily="34" charset="0"/>
-                <a:ea typeface="Malgun Gothic" pitchFamily="34" charset="-122"/>
-                <a:cs typeface="Malgun Gothic" pitchFamily="34" charset="-120"/>
-              </a:rPr>
-              <a:t>커스텀 매출 비중</a:t>
-            </a:r>
-            <a:endParaRPr lang="en-US" sz="1200" dirty="0"/>
-          </a:p>
-        </p:txBody>
-      </p:sp>
-      <p:sp>
-        <p:nvSpPr>
-          <p:cNvPr id="79" name="Text 70"/>
-          <p:cNvSpPr/>
-          <p:nvPr/>
-        </p:nvSpPr>
-        <p:spPr>
-          <a:xfrm>
-            <a:off x="7232904" y="5687568"/>
-            <a:ext cx="2167128" cy="384048"/>
-          </a:xfrm>
-          <a:prstGeom prst="rect">
-            <a:avLst/>
-          </a:prstGeom>
-          <a:noFill/>
-          <a:ln/>
-        </p:spPr>
-        <p:txBody>
-          <a:bodyPr wrap="square" lIns="0" tIns="0" rIns="0" bIns="0" rtlCol="0" anchor="ctr"/>
-          <a:lstStyle/>
-          <a:p>
-            <a:pPr algn="ctr" indent="0" marL="0">
-              <a:buNone/>
-            </a:pPr>
-            <a:r>
-              <a:rPr lang="en-US" sz="2400" b="1" dirty="0">
-                <a:solidFill>
-                  <a:srgbClr val="17313B"/>
-                </a:solidFill>
-                <a:latin typeface="Malgun Gothic" pitchFamily="34" charset="0"/>
-                <a:ea typeface="Malgun Gothic" pitchFamily="34" charset="-122"/>
-                <a:cs typeface="Malgun Gothic" pitchFamily="34" charset="-120"/>
-              </a:rPr>
-              <a:t>25%</a:t>
-            </a:r>
-            <a:endParaRPr lang="en-US" sz="2400" dirty="0"/>
-          </a:p>
-        </p:txBody>
-      </p:sp>
-      <p:sp>
-        <p:nvSpPr>
-          <p:cNvPr id="80" name="Text 71"/>
-          <p:cNvSpPr/>
-          <p:nvPr/>
-        </p:nvSpPr>
-        <p:spPr>
-          <a:xfrm>
-            <a:off x="7232904" y="6089904"/>
-            <a:ext cx="2167128" cy="237744"/>
-          </a:xfrm>
-          <a:prstGeom prst="rect">
-            <a:avLst/>
-          </a:prstGeom>
-          <a:noFill/>
-          <a:ln/>
-        </p:spPr>
-        <p:txBody>
-          <a:bodyPr wrap="square" lIns="0" tIns="0" rIns="0" bIns="0" rtlCol="0" anchor="ctr"/>
-          <a:lstStyle/>
-          <a:p>
-            <a:pPr algn="ctr" indent="0" marL="0">
-              <a:buNone/>
-            </a:pPr>
-            <a:r>
-              <a:rPr lang="en-US" sz="1200" dirty="0">
-                <a:solidFill>
-                  <a:srgbClr val="5A7184"/>
-                </a:solidFill>
-                <a:latin typeface="Malgun Gothic" pitchFamily="34" charset="0"/>
-                <a:ea typeface="Malgun Gothic" pitchFamily="34" charset="-122"/>
-                <a:cs typeface="Malgun Gothic" pitchFamily="34" charset="-120"/>
-              </a:rPr>
-              <a:t>고객 직접 교류 시간</a:t>
-            </a:r>
-            <a:endParaRPr lang="en-US" sz="1200" dirty="0"/>
-          </a:p>
-        </p:txBody>
-      </p:sp>
-      <p:sp>
-        <p:nvSpPr>
-          <p:cNvPr id="81" name="Text 72"/>
-          <p:cNvSpPr/>
-          <p:nvPr/>
-        </p:nvSpPr>
-        <p:spPr>
-          <a:xfrm>
-            <a:off x="9491472" y="5687568"/>
-            <a:ext cx="2167128" cy="384048"/>
-          </a:xfrm>
-          <a:prstGeom prst="rect">
-            <a:avLst/>
-          </a:prstGeom>
-          <a:noFill/>
-          <a:ln/>
-        </p:spPr>
-        <p:txBody>
-          <a:bodyPr wrap="square" lIns="0" tIns="0" rIns="0" bIns="0" rtlCol="0" anchor="ctr"/>
-          <a:lstStyle/>
-          <a:p>
-            <a:pPr algn="ctr" indent="0" marL="0">
-              <a:buNone/>
-            </a:pPr>
-            <a:r>
-              <a:rPr lang="en-US" sz="2400" b="1" dirty="0">
-                <a:solidFill>
-                  <a:srgbClr val="02A878"/>
-                </a:solidFill>
-                <a:latin typeface="Malgun Gothic" pitchFamily="34" charset="0"/>
-                <a:ea typeface="Malgun Gothic" pitchFamily="34" charset="-122"/>
-                <a:cs typeface="Malgun Gothic" pitchFamily="34" charset="-120"/>
-              </a:rPr>
-              <a:t>5명+</a:t>
-            </a:r>
-            <a:endParaRPr lang="en-US" sz="2400" dirty="0"/>
-          </a:p>
-        </p:txBody>
-      </p:sp>
-      <p:sp>
-        <p:nvSpPr>
-          <p:cNvPr id="82" name="Text 73"/>
-          <p:cNvSpPr/>
-          <p:nvPr/>
-        </p:nvSpPr>
-        <p:spPr>
-          <a:xfrm>
-            <a:off x="9491472" y="6089904"/>
-            <a:ext cx="2167128" cy="237744"/>
-          </a:xfrm>
-          <a:prstGeom prst="rect">
-            <a:avLst/>
-          </a:prstGeom>
-          <a:noFill/>
-          <a:ln/>
-        </p:spPr>
-        <p:txBody>
-          <a:bodyPr wrap="square" lIns="0" tIns="0" rIns="0" bIns="0" rtlCol="0" anchor="ctr"/>
-          <a:lstStyle/>
-          <a:p>
-            <a:pPr algn="ctr" indent="0" marL="0">
-              <a:buNone/>
-            </a:pPr>
-            <a:r>
-              <a:rPr lang="en-US" sz="1200" dirty="0">
-                <a:solidFill>
-                  <a:srgbClr val="5A7184"/>
-                </a:solidFill>
-                <a:latin typeface="Malgun Gothic" pitchFamily="34" charset="0"/>
-                <a:ea typeface="Malgun Gothic" pitchFamily="34" charset="-122"/>
-                <a:cs typeface="Malgun Gothic" pitchFamily="34" charset="-120"/>
-              </a:rPr>
-              <a:t>실리콘밸리 스타 영입</a:t>
-            </a:r>
-            <a:endParaRPr lang="en-US" sz="1200" dirty="0"/>
+              <a:t>스타 영입 축적 → 조직 수준 상향</a:t>
+            </a:r>
+            <a:endParaRPr lang="en-US" sz="1250" dirty="0"/>
           </a:p>
         </p:txBody>
       </p:sp>

--- a/dashboard/public/downloads/dev-transformation-summary-high.pptx
+++ b/dashboard/public/downloads/dev-transformation-summary-high.pptx
@@ -877,7 +877,7 @@
         <p:spPr>
           <a:xfrm>
             <a:off x="457200" y="237744"/>
-            <a:ext cx="9692640" cy="566928"/>
+            <a:ext cx="9994392" cy="566928"/>
           </a:xfrm>
           <a:prstGeom prst="rect">
             <a:avLst/>
